--- a/assets/paradigm_comparison_v3.pptx
+++ b/assets/paradigm_comparison_v3.pptx
@@ -10,7 +10,7 @@
   <p:sldIdLst>
     <p:sldId id="257" r:id="rId2"/>
   </p:sldIdLst>
-  <p:sldSz cx="12192000" cy="7045325"/>
+  <p:sldSz cx="12192000" cy="6714176"/>
   <p:notesSz cx="7045325" cy="12192000"/>
   <p:defaultTextStyle>
     <a:lvl1pPr marL="0" algn="l" defTabSz="914400" rtl="0" eaLnBrk="1" latinLnBrk="0" hangingPunct="1">
@@ -719,7 +719,7 @@
         </p:nvSpPr>
         <p:spPr>
           <a:xfrm>
-            <a:off x="4615606" y="2885534"/>
+            <a:off x="4615606" y="3011472"/>
             <a:ext cx="990397" cy="830684"/>
           </a:xfrm>
           <a:prstGeom prst="line">
@@ -744,7 +744,7 @@
         </p:nvSpPr>
         <p:spPr>
           <a:xfrm>
-            <a:off x="5887061" y="2902005"/>
+            <a:off x="5887061" y="3027943"/>
             <a:ext cx="7372" cy="814213"/>
           </a:xfrm>
           <a:prstGeom prst="line">
@@ -769,7 +769,7 @@
         </p:nvSpPr>
         <p:spPr>
           <a:xfrm flipH="1">
-            <a:off x="6376482" y="2885534"/>
+            <a:off x="6376482" y="3011472"/>
             <a:ext cx="1187116" cy="830684"/>
           </a:xfrm>
           <a:prstGeom prst="line">
@@ -869,7 +869,7 @@
         </p:nvSpPr>
         <p:spPr>
           <a:xfrm>
-            <a:off x="6648376" y="1767797"/>
+            <a:off x="6648376" y="1893735"/>
             <a:ext cx="42471" cy="42471"/>
           </a:xfrm>
           <a:prstGeom prst="ellipse">
@@ -894,7 +894,7 @@
         </p:nvSpPr>
         <p:spPr>
           <a:xfrm>
-            <a:off x="6748308" y="1767797"/>
+            <a:off x="6748308" y="1893735"/>
             <a:ext cx="42471" cy="42471"/>
           </a:xfrm>
           <a:prstGeom prst="ellipse">
@@ -919,7 +919,7 @@
         </p:nvSpPr>
         <p:spPr>
           <a:xfrm>
-            <a:off x="6848240" y="1767797"/>
+            <a:off x="6848240" y="1893735"/>
             <a:ext cx="42471" cy="42471"/>
           </a:xfrm>
           <a:prstGeom prst="ellipse">
@@ -1051,7 +1051,7 @@
         </p:blipFill>
         <p:spPr>
           <a:xfrm>
-            <a:off x="4322056" y="1449013"/>
+            <a:off x="4322056" y="1574951"/>
             <a:ext cx="618329" cy="587100"/>
           </a:xfrm>
           <a:prstGeom prst="rect">
@@ -1075,7 +1075,7 @@
         </p:blipFill>
         <p:spPr>
           <a:xfrm>
-            <a:off x="5608679" y="1455259"/>
+            <a:off x="5608679" y="1581197"/>
             <a:ext cx="618329" cy="574609"/>
           </a:xfrm>
           <a:prstGeom prst="rect">
@@ -1099,7 +1099,7 @@
         </p:blipFill>
         <p:spPr>
           <a:xfrm>
-            <a:off x="7270048" y="1455259"/>
+            <a:off x="7270048" y="1581197"/>
             <a:ext cx="624575" cy="580854"/>
           </a:xfrm>
           <a:prstGeom prst="rect">
@@ -1123,7 +1123,7 @@
         </p:blipFill>
         <p:spPr>
           <a:xfrm>
-            <a:off x="4415742" y="2379629"/>
+            <a:off x="4415742" y="2505567"/>
             <a:ext cx="405973" cy="468431"/>
           </a:xfrm>
           <a:prstGeom prst="rect">
@@ -1147,7 +1147,7 @@
         </p:blipFill>
         <p:spPr>
           <a:xfrm>
-            <a:off x="5677383" y="2385875"/>
+            <a:off x="5677383" y="2511813"/>
             <a:ext cx="399728" cy="468431"/>
           </a:xfrm>
           <a:prstGeom prst="rect">
@@ -1171,7 +1171,7 @@
         </p:blipFill>
         <p:spPr>
           <a:xfrm>
-            <a:off x="7363734" y="2379629"/>
+            <a:off x="7363734" y="2505567"/>
             <a:ext cx="399728" cy="468431"/>
           </a:xfrm>
           <a:prstGeom prst="rect">
@@ -1195,7 +1195,7 @@
         </p:blipFill>
         <p:spPr>
           <a:xfrm>
-            <a:off x="5327110" y="3750667"/>
+            <a:off x="5327110" y="3876605"/>
             <a:ext cx="1317852" cy="1261641"/>
           </a:xfrm>
           <a:prstGeom prst="rect">
@@ -1717,7 +1717,7 @@
         </p:nvSpPr>
         <p:spPr>
           <a:xfrm>
-            <a:off x="4388904" y="2108704"/>
+            <a:off x="4388904" y="2234642"/>
             <a:ext cx="459650" cy="192087"/>
           </a:xfrm>
           <a:prstGeom prst="rect">
@@ -1759,7 +1759,7 @@
         </p:nvSpPr>
         <p:spPr>
           <a:xfrm>
-            <a:off x="5650544" y="2108704"/>
+            <a:off x="5650544" y="2234642"/>
             <a:ext cx="459650" cy="192087"/>
           </a:xfrm>
           <a:prstGeom prst="rect">
@@ -1801,7 +1801,7 @@
         </p:nvSpPr>
         <p:spPr>
           <a:xfrm>
-            <a:off x="7328085" y="2108704"/>
+            <a:off x="7328085" y="2234642"/>
             <a:ext cx="477271" cy="192087"/>
           </a:xfrm>
           <a:prstGeom prst="rect">
@@ -1843,7 +1843,7 @@
         </p:nvSpPr>
         <p:spPr>
           <a:xfrm>
-            <a:off x="4151845" y="3269011"/>
+            <a:off x="4151845" y="3394949"/>
             <a:ext cx="1249149" cy="384175"/>
           </a:xfrm>
           <a:prstGeom prst="rect">
@@ -1894,7 +1894,7 @@
         </p:nvSpPr>
         <p:spPr>
           <a:xfrm>
-            <a:off x="5291136" y="5052232"/>
+            <a:off x="5291136" y="5178170"/>
             <a:ext cx="1377308" cy="207455"/>
           </a:xfrm>
           <a:prstGeom prst="rect">
@@ -1936,7 +1936,7 @@
         </p:nvSpPr>
         <p:spPr>
           <a:xfrm>
-            <a:off x="5001888" y="5252096"/>
+            <a:off x="5001888" y="5378034"/>
             <a:ext cx="1968296" cy="207455"/>
           </a:xfrm>
           <a:prstGeom prst="rect">

--- a/assets/paradigm_comparison_v3.pptx
+++ b/assets/paradigm_comparison_v3.pptx
@@ -10,7 +10,7 @@
   <p:sldIdLst>
     <p:sldId id="257" r:id="rId2"/>
   </p:sldIdLst>
-  <p:sldSz cx="12192000" cy="6714176"/>
+  <p:sldSz cx="12192000" cy="5136739"/>
   <p:notesSz cx="7045325" cy="12192000"/>
   <p:defaultTextStyle>
     <a:lvl1pPr marL="0" algn="l" defTabSz="914400" rtl="0" eaLnBrk="1" latinLnBrk="0" hangingPunct="1">
@@ -669,8 +669,8 @@
         </p:nvSpPr>
         <p:spPr>
           <a:xfrm>
-            <a:off x="4059735" y="187372"/>
-            <a:ext cx="0" cy="6339432"/>
+            <a:off x="4148635" y="187371"/>
+            <a:ext cx="0" cy="4732583"/>
           </a:xfrm>
           <a:prstGeom prst="line">
             <a:avLst/>
@@ -694,8 +694,8 @@
         </p:nvSpPr>
         <p:spPr>
           <a:xfrm>
-            <a:off x="8156944" y="187372"/>
-            <a:ext cx="0" cy="6339432"/>
+            <a:off x="8156944" y="202349"/>
+            <a:ext cx="0" cy="4747019"/>
           </a:xfrm>
           <a:prstGeom prst="line">
             <a:avLst/>
@@ -719,8 +719,8 @@
         </p:nvSpPr>
         <p:spPr>
           <a:xfrm>
-            <a:off x="4615606" y="3011472"/>
-            <a:ext cx="990397" cy="830684"/>
+            <a:off x="4660057" y="2637884"/>
+            <a:ext cx="896593" cy="463877"/>
           </a:xfrm>
           <a:prstGeom prst="line">
             <a:avLst/>
@@ -744,8 +744,8 @@
         </p:nvSpPr>
         <p:spPr>
           <a:xfrm>
-            <a:off x="5887061" y="3027943"/>
-            <a:ext cx="7372" cy="814213"/>
+            <a:off x="5931511" y="2654355"/>
+            <a:ext cx="0" cy="463877"/>
           </a:xfrm>
           <a:prstGeom prst="line">
             <a:avLst/>
@@ -769,8 +769,8 @@
         </p:nvSpPr>
         <p:spPr>
           <a:xfrm flipH="1">
-            <a:off x="6376482" y="3011472"/>
-            <a:ext cx="1187116" cy="830684"/>
+            <a:off x="6372296" y="2637884"/>
+            <a:ext cx="1235752" cy="463877"/>
           </a:xfrm>
           <a:prstGeom prst="line">
             <a:avLst/>
@@ -794,8 +794,8 @@
         </p:nvSpPr>
         <p:spPr>
           <a:xfrm>
-            <a:off x="11154901" y="1698843"/>
-            <a:ext cx="874404" cy="0"/>
+            <a:off x="10621515" y="1305143"/>
+            <a:ext cx="1407790" cy="0"/>
           </a:xfrm>
           <a:prstGeom prst="line">
             <a:avLst/>
@@ -819,8 +819,8 @@
         </p:nvSpPr>
         <p:spPr>
           <a:xfrm>
-            <a:off x="12019146" y="1698843"/>
-            <a:ext cx="0" cy="3922328"/>
+            <a:off x="12019146" y="1305143"/>
+            <a:ext cx="0" cy="2902329"/>
           </a:xfrm>
           <a:prstGeom prst="line">
             <a:avLst/>
@@ -844,8 +844,8 @@
         </p:nvSpPr>
         <p:spPr>
           <a:xfrm flipH="1">
-            <a:off x="10761419" y="5621171"/>
-            <a:ext cx="1267886" cy="0"/>
+            <a:off x="10557702" y="4197516"/>
+            <a:ext cx="1471603" cy="0"/>
           </a:xfrm>
           <a:prstGeom prst="line">
             <a:avLst/>
@@ -869,7 +869,7 @@
         </p:nvSpPr>
         <p:spPr>
           <a:xfrm>
-            <a:off x="6648376" y="1893735"/>
+            <a:off x="6692826" y="1520147"/>
             <a:ext cx="42471" cy="42471"/>
           </a:xfrm>
           <a:prstGeom prst="ellipse">
@@ -894,7 +894,7 @@
         </p:nvSpPr>
         <p:spPr>
           <a:xfrm>
-            <a:off x="6748308" y="1893735"/>
+            <a:off x="6792758" y="1520147"/>
             <a:ext cx="42471" cy="42471"/>
           </a:xfrm>
           <a:prstGeom prst="ellipse">
@@ -919,7 +919,7 @@
         </p:nvSpPr>
         <p:spPr>
           <a:xfrm>
-            <a:off x="6848240" y="1893735"/>
+            <a:off x="6892690" y="1520147"/>
             <a:ext cx="42471" cy="42471"/>
           </a:xfrm>
           <a:prstGeom prst="ellipse">
@@ -944,7 +944,7 @@
         </p:nvSpPr>
         <p:spPr>
           <a:xfrm>
-            <a:off x="10521583" y="3532594"/>
+            <a:off x="10521583" y="2637244"/>
             <a:ext cx="42471" cy="42471"/>
           </a:xfrm>
           <a:prstGeom prst="ellipse">
@@ -969,7 +969,7 @@
         </p:nvSpPr>
         <p:spPr>
           <a:xfrm>
-            <a:off x="10621515" y="3532594"/>
+            <a:off x="10621515" y="2637244"/>
             <a:ext cx="42471" cy="42471"/>
           </a:xfrm>
           <a:prstGeom prst="ellipse">
@@ -994,7 +994,7 @@
         </p:nvSpPr>
         <p:spPr>
           <a:xfrm>
-            <a:off x="10721447" y="3532594"/>
+            <a:off x="10721447" y="2637244"/>
             <a:ext cx="42471" cy="42471"/>
           </a:xfrm>
           <a:prstGeom prst="ellipse">
@@ -1027,8 +1027,8 @@
         </p:blipFill>
         <p:spPr>
           <a:xfrm>
-            <a:off x="1323233" y="2913110"/>
-            <a:ext cx="857722" cy="880650"/>
+            <a:off x="385947" y="2982352"/>
+            <a:ext cx="1028819" cy="880650"/>
           </a:xfrm>
           <a:prstGeom prst="rect">
             <a:avLst/>
@@ -1051,7 +1051,7 @@
         </p:blipFill>
         <p:spPr>
           <a:xfrm>
-            <a:off x="4322056" y="1574951"/>
+            <a:off x="4366506" y="1201363"/>
             <a:ext cx="618329" cy="587100"/>
           </a:xfrm>
           <a:prstGeom prst="rect">
@@ -1075,7 +1075,7 @@
         </p:blipFill>
         <p:spPr>
           <a:xfrm>
-            <a:off x="5608679" y="1581197"/>
+            <a:off x="5653129" y="1207609"/>
             <a:ext cx="618329" cy="574609"/>
           </a:xfrm>
           <a:prstGeom prst="rect">
@@ -1099,7 +1099,7 @@
         </p:blipFill>
         <p:spPr>
           <a:xfrm>
-            <a:off x="7270048" y="1581197"/>
+            <a:off x="7314498" y="1207609"/>
             <a:ext cx="624575" cy="580854"/>
           </a:xfrm>
           <a:prstGeom prst="rect">
@@ -1123,7 +1123,7 @@
         </p:blipFill>
         <p:spPr>
           <a:xfrm>
-            <a:off x="4415742" y="2505567"/>
+            <a:off x="4460192" y="2131979"/>
             <a:ext cx="405973" cy="468431"/>
           </a:xfrm>
           <a:prstGeom prst="rect">
@@ -1147,7 +1147,7 @@
         </p:blipFill>
         <p:spPr>
           <a:xfrm>
-            <a:off x="5677383" y="2511813"/>
+            <a:off x="5721833" y="2138225"/>
             <a:ext cx="399728" cy="468431"/>
           </a:xfrm>
           <a:prstGeom prst="rect">
@@ -1171,7 +1171,7 @@
         </p:blipFill>
         <p:spPr>
           <a:xfrm>
-            <a:off x="7363734" y="2505567"/>
+            <a:off x="7408184" y="2131979"/>
             <a:ext cx="399728" cy="468431"/>
           </a:xfrm>
           <a:prstGeom prst="rect">
@@ -1181,7 +1181,7 @@
       </p:pic>
       <p:pic>
         <p:nvPicPr>
-          <p:cNvPr id="33" name="Image 9" descr="/liziqing/yukai/AI4AI4Cell/paradigm_figure_icons/net_b.png"/>
+          <p:cNvPr id="35" name="Image 11" descr="/liziqing/yukai/AI4AI4Cell/paradigm_figure_icons/lab_1_C.png"/>
           <p:cNvPicPr>
             <a:picLocks noChangeAspect="1"/>
           </p:cNvPicPr>
@@ -1195,8 +1195,8 @@
         </p:blipFill>
         <p:spPr>
           <a:xfrm>
-            <a:off x="5327110" y="3876605"/>
-            <a:ext cx="1317852" cy="1261641"/>
+            <a:off x="8456739" y="2308717"/>
+            <a:ext cx="593346" cy="512151"/>
           </a:xfrm>
           <a:prstGeom prst="rect">
             <a:avLst/>
@@ -1205,7 +1205,7 @@
       </p:pic>
       <p:pic>
         <p:nvPicPr>
-          <p:cNvPr id="34" name="Image 10" descr="/liziqing/yukai/AI4AI4Cell/paradigm_figure_icons/loop_c.png"/>
+          <p:cNvPr id="36" name="Image 12" descr="/liziqing/yukai/AI4AI4Cell/paradigm_figure_icons/lab_2_C.png"/>
           <p:cNvPicPr>
             <a:picLocks noChangeAspect="1"/>
           </p:cNvPicPr>
@@ -1219,8 +1219,8 @@
         </p:blipFill>
         <p:spPr>
           <a:xfrm>
-            <a:off x="9599711" y="1024302"/>
-            <a:ext cx="1548945" cy="1224166"/>
+            <a:off x="9624694" y="2308717"/>
+            <a:ext cx="587100" cy="512151"/>
           </a:xfrm>
           <a:prstGeom prst="rect">
             <a:avLst/>
@@ -1229,7 +1229,7 @@
       </p:pic>
       <p:pic>
         <p:nvPicPr>
-          <p:cNvPr id="35" name="Image 11" descr="/liziqing/yukai/AI4AI4Cell/paradigm_figure_icons/lab_1_C.png"/>
+          <p:cNvPr id="37" name="Image 13" descr="/liziqing/yukai/AI4AI4Cell/paradigm_figure_icons/lab_K_C.png"/>
           <p:cNvPicPr>
             <a:picLocks noChangeAspect="1"/>
           </p:cNvPicPr>
@@ -1243,8 +1243,8 @@
         </p:blipFill>
         <p:spPr>
           <a:xfrm>
-            <a:off x="8456739" y="3204067"/>
-            <a:ext cx="593346" cy="512151"/>
+            <a:off x="11148656" y="2308717"/>
+            <a:ext cx="599592" cy="512151"/>
           </a:xfrm>
           <a:prstGeom prst="rect">
             <a:avLst/>
@@ -1253,7 +1253,7 @@
       </p:pic>
       <p:pic>
         <p:nvPicPr>
-          <p:cNvPr id="36" name="Image 12" descr="/liziqing/yukai/AI4AI4Cell/paradigm_figure_icons/lab_2_C.png"/>
+          <p:cNvPr id="38" name="Image 14" descr="/liziqing/yukai/AI4AI4Cell/paradigm_figure_icons/db_1_C.png"/>
           <p:cNvPicPr>
             <a:picLocks noChangeAspect="1"/>
           </p:cNvPicPr>
@@ -1267,8 +1267,8 @@
         </p:blipFill>
         <p:spPr>
           <a:xfrm>
-            <a:off x="9624694" y="3204067"/>
-            <a:ext cx="587100" cy="512151"/>
+            <a:off x="8343336" y="2630498"/>
+            <a:ext cx="206490" cy="216814"/>
           </a:xfrm>
           <a:prstGeom prst="rect">
             <a:avLst/>
@@ -1277,7 +1277,7 @@
       </p:pic>
       <p:pic>
         <p:nvPicPr>
-          <p:cNvPr id="37" name="Image 13" descr="/liziqing/yukai/AI4AI4Cell/paradigm_figure_icons/lab_K_C.png"/>
+          <p:cNvPr id="39" name="Image 15" descr="/liziqing/yukai/AI4AI4Cell/paradigm_figure_icons/db_2_C.png"/>
           <p:cNvPicPr>
             <a:picLocks noChangeAspect="1"/>
           </p:cNvPicPr>
@@ -1291,8 +1291,8 @@
         </p:blipFill>
         <p:spPr>
           <a:xfrm>
-            <a:off x="11148656" y="3204067"/>
-            <a:ext cx="599592" cy="512151"/>
+            <a:off x="9512332" y="2637244"/>
+            <a:ext cx="206490" cy="216814"/>
           </a:xfrm>
           <a:prstGeom prst="rect">
             <a:avLst/>
@@ -1301,7 +1301,7 @@
       </p:pic>
       <p:pic>
         <p:nvPicPr>
-          <p:cNvPr id="38" name="Image 14" descr="/liziqing/yukai/AI4AI4Cell/paradigm_figure_icons/db_1_C.png"/>
+          <p:cNvPr id="40" name="Image 16" descr="/liziqing/yukai/AI4AI4Cell/paradigm_figure_icons/db_K_C.png"/>
           <p:cNvPicPr>
             <a:picLocks noChangeAspect="1"/>
           </p:cNvPicPr>
@@ -1315,8 +1315,8 @@
         </p:blipFill>
         <p:spPr>
           <a:xfrm>
-            <a:off x="8525443" y="3991031"/>
-            <a:ext cx="374745" cy="393482"/>
+            <a:off x="11048369" y="2633760"/>
+            <a:ext cx="199993" cy="213552"/>
           </a:xfrm>
           <a:prstGeom prst="rect">
             <a:avLst/>
@@ -1325,7 +1325,7 @@
       </p:pic>
       <p:pic>
         <p:nvPicPr>
-          <p:cNvPr id="39" name="Image 15" descr="/liziqing/yukai/AI4AI4Cell/paradigm_figure_icons/db_2_C.png"/>
+          <p:cNvPr id="41" name="Image 17" descr="/liziqing/yukai/AI4AI4Cell/paradigm_figure_icons/net_c.png"/>
           <p:cNvPicPr>
             <a:picLocks noChangeAspect="1"/>
           </p:cNvPicPr>
@@ -1339,55 +1339,7 @@
         </p:blipFill>
         <p:spPr>
           <a:xfrm>
-            <a:off x="9693397" y="3991031"/>
-            <a:ext cx="374745" cy="393482"/>
-          </a:xfrm>
-          <a:prstGeom prst="rect">
-            <a:avLst/>
-          </a:prstGeom>
-        </p:spPr>
-      </p:pic>
-      <p:pic>
-        <p:nvPicPr>
-          <p:cNvPr id="40" name="Image 16" descr="/liziqing/yukai/AI4AI4Cell/paradigm_figure_icons/db_K_C.png"/>
-          <p:cNvPicPr>
-            <a:picLocks noChangeAspect="1"/>
-          </p:cNvPicPr>
-          <p:nvPr/>
-        </p:nvPicPr>
-        <p:blipFill>
-          <a:blip r:embed="rId17"/>
-          <a:stretch>
-            <a:fillRect/>
-          </a:stretch>
-        </p:blipFill>
-        <p:spPr>
-          <a:xfrm>
-            <a:off x="11242342" y="3991031"/>
-            <a:ext cx="368499" cy="393482"/>
-          </a:xfrm>
-          <a:prstGeom prst="rect">
-            <a:avLst/>
-          </a:prstGeom>
-        </p:spPr>
-      </p:pic>
-      <p:pic>
-        <p:nvPicPr>
-          <p:cNvPr id="41" name="Image 17" descr="/liziqing/yukai/AI4AI4Cell/paradigm_figure_icons/net_c.png"/>
-          <p:cNvPicPr>
-            <a:picLocks noChangeAspect="1"/>
-          </p:cNvPicPr>
-          <p:nvPr/>
-        </p:nvPicPr>
-        <p:blipFill>
-          <a:blip r:embed="rId18"/>
-          <a:stretch>
-            <a:fillRect/>
-          </a:stretch>
-        </p:blipFill>
-        <p:spPr>
-          <a:xfrm>
-            <a:off x="9411474" y="5095389"/>
+            <a:off x="9411474" y="3704739"/>
             <a:ext cx="1124234" cy="986828"/>
           </a:xfrm>
           <a:prstGeom prst="rect">
@@ -1655,8 +1607,8 @@
         </p:nvSpPr>
         <p:spPr>
           <a:xfrm>
-            <a:off x="1134939" y="3829890"/>
-            <a:ext cx="1249149" cy="414909"/>
+            <a:off x="-175142" y="3810215"/>
+            <a:ext cx="2244556" cy="414909"/>
           </a:xfrm>
           <a:prstGeom prst="rect">
             <a:avLst/>
@@ -1675,7 +1627,7 @@
               <a:buNone/>
             </a:pPr>
             <a:r>
-              <a:rPr lang="en-US" sz="1350" dirty="0">
+              <a:rPr lang="en-US" sz="1600">
                 <a:solidFill>
                   <a:srgbClr val="2B3644"/>
                 </a:solidFill>
@@ -1683,29 +1635,9 @@
                 <a:ea typeface="Arial" pitchFamily="34" charset="-122"/>
                 <a:cs typeface="Arial" pitchFamily="34" charset="-120"/>
               </a:rPr>
-              <a:t>Accessible</a:t>
+              <a:t>Accessible dataset</a:t>
             </a:r>
-            <a:endParaRPr lang="en-US" sz="1350" dirty="0"/>
-          </a:p>
-          <a:p>
-            <a:pPr marL="0" indent="0" algn="ctr">
-              <a:lnSpc>
-                <a:spcPct val="92000"/>
-              </a:lnSpc>
-              <a:buNone/>
-            </a:pPr>
-            <a:r>
-              <a:rPr lang="en-US" sz="1350" dirty="0">
-                <a:solidFill>
-                  <a:srgbClr val="2B3644"/>
-                </a:solidFill>
-                <a:latin typeface="Arial" pitchFamily="34" charset="0"/>
-                <a:ea typeface="Arial" pitchFamily="34" charset="-122"/>
-                <a:cs typeface="Arial" pitchFamily="34" charset="-120"/>
-              </a:rPr>
-              <a:t>dataset</a:t>
-            </a:r>
-            <a:endParaRPr lang="en-US" sz="1350" dirty="0"/>
+            <a:endParaRPr lang="en-US" sz="1600" dirty="0"/>
           </a:p>
         </p:txBody>
       </p:sp>
@@ -1717,7 +1649,7 @@
         </p:nvSpPr>
         <p:spPr>
           <a:xfrm>
-            <a:off x="4388904" y="2234642"/>
+            <a:off x="4433354" y="1861054"/>
             <a:ext cx="459650" cy="192087"/>
           </a:xfrm>
           <a:prstGeom prst="rect">
@@ -1759,7 +1691,7 @@
         </p:nvSpPr>
         <p:spPr>
           <a:xfrm>
-            <a:off x="5650544" y="2234642"/>
+            <a:off x="5694994" y="1861054"/>
             <a:ext cx="459650" cy="192087"/>
           </a:xfrm>
           <a:prstGeom prst="rect">
@@ -1801,7 +1733,7 @@
         </p:nvSpPr>
         <p:spPr>
           <a:xfrm>
-            <a:off x="7328085" y="2234642"/>
+            <a:off x="7372535" y="1861054"/>
             <a:ext cx="477271" cy="192087"/>
           </a:xfrm>
           <a:prstGeom prst="rect">
@@ -1843,7 +1775,1045 @@
         </p:nvSpPr>
         <p:spPr>
           <a:xfrm>
-            <a:off x="4151845" y="3394949"/>
+            <a:off x="4460192" y="2849688"/>
+            <a:ext cx="826867" cy="384175"/>
+          </a:xfrm>
+          <a:prstGeom prst="rect">
+            <a:avLst/>
+          </a:prstGeom>
+          <a:noFill/>
+          <a:ln/>
+        </p:spPr>
+        <p:txBody>
+          <a:bodyPr wrap="square" lIns="0" tIns="0" rIns="0" bIns="0" rtlCol="0" anchor="ctr"/>
+          <a:lstStyle>
+            <a:lvl1pPr indent="0" algn="ctr">
+              <a:lnSpc>
+                <a:spcPct val="92000"/>
+              </a:lnSpc>
+              <a:buNone/>
+              <a:defRPr sz="1100">
+                <a:solidFill>
+                  <a:srgbClr val="4472C4"/>
+                </a:solidFill>
+                <a:latin typeface="Arial" pitchFamily="34" charset="0"/>
+                <a:ea typeface="Arial" pitchFamily="34" charset="-122"/>
+                <a:cs typeface="Arial" pitchFamily="34" charset="-120"/>
+              </a:defRPr>
+            </a:lvl1pPr>
+          </a:lstStyle>
+          <a:p>
+            <a:r>
+              <a:rPr lang="en-US" sz="1200"/>
+              <a:t>Local</a:t>
+            </a:r>
+            <a:endParaRPr lang="en-US" sz="1200" dirty="0"/>
+          </a:p>
+          <a:p>
+            <a:r>
+              <a:rPr lang="en-US" sz="1200"/>
+              <a:t>update</a:t>
+            </a:r>
+            <a:endParaRPr lang="en-US" sz="1200" dirty="0"/>
+          </a:p>
+        </p:txBody>
+      </p:sp>
+      <p:sp>
+        <p:nvSpPr>
+          <p:cNvPr id="62" name="Text 42"/>
+          <p:cNvSpPr txBox="1"/>
+          <p:nvPr/>
+        </p:nvSpPr>
+        <p:spPr>
+          <a:xfrm>
+            <a:off x="4961490" y="4238846"/>
+            <a:ext cx="1968296" cy="207455"/>
+          </a:xfrm>
+          <a:prstGeom prst="rect">
+            <a:avLst/>
+          </a:prstGeom>
+          <a:noFill/>
+          <a:ln/>
+        </p:spPr>
+        <p:txBody>
+          <a:bodyPr wrap="square" lIns="0" tIns="0" rIns="0" bIns="0" rtlCol="0" anchor="ctr"/>
+          <a:lstStyle/>
+          <a:p>
+            <a:pPr marL="0" indent="0" algn="ctr">
+              <a:lnSpc>
+                <a:spcPct val="92000"/>
+              </a:lnSpc>
+              <a:buNone/>
+            </a:pPr>
+            <a:r>
+              <a:rPr lang="en-US" sz="1350" dirty="0">
+                <a:solidFill>
+                  <a:srgbClr val="6E7B87"/>
+                </a:solidFill>
+                <a:latin typeface="Arial" pitchFamily="34" charset="0"/>
+                <a:ea typeface="Arial" pitchFamily="34" charset="-122"/>
+                <a:cs typeface="Arial" pitchFamily="34" charset="-120"/>
+              </a:rPr>
+              <a:t>(design fixed in advance)</a:t>
+            </a:r>
+            <a:endParaRPr lang="en-US" sz="1350" dirty="0"/>
+          </a:p>
+        </p:txBody>
+      </p:sp>
+      <p:sp>
+        <p:nvSpPr>
+          <p:cNvPr id="64" name="Text 44"/>
+          <p:cNvSpPr txBox="1"/>
+          <p:nvPr/>
+        </p:nvSpPr>
+        <p:spPr>
+          <a:xfrm>
+            <a:off x="10683387" y="963363"/>
+            <a:ext cx="1268270" cy="338074"/>
+          </a:xfrm>
+          <a:prstGeom prst="rect">
+            <a:avLst/>
+          </a:prstGeom>
+          <a:noFill/>
+          <a:ln/>
+        </p:spPr>
+        <p:txBody>
+          <a:bodyPr wrap="square" lIns="0" tIns="0" rIns="0" bIns="0" rtlCol="0" anchor="ctr"/>
+          <a:lstStyle/>
+          <a:p>
+            <a:pPr marL="0" indent="0" algn="ctr">
+              <a:lnSpc>
+                <a:spcPct val="92000"/>
+              </a:lnSpc>
+              <a:buNone/>
+            </a:pPr>
+            <a:r>
+              <a:rPr lang="en-US" sz="1400">
+                <a:solidFill>
+                  <a:srgbClr val="3F8F5C"/>
+                </a:solidFill>
+                <a:latin typeface="Arial" pitchFamily="34" charset="0"/>
+                <a:ea typeface="Arial" pitchFamily="34" charset="-122"/>
+                <a:cs typeface="Arial" pitchFamily="34" charset="-120"/>
+              </a:rPr>
+              <a:t>Design revision</a:t>
+            </a:r>
+            <a:endParaRPr lang="en-US" sz="1400" dirty="0">
+              <a:solidFill>
+                <a:srgbClr val="3F8F5C"/>
+              </a:solidFill>
+            </a:endParaRPr>
+          </a:p>
+        </p:txBody>
+      </p:sp>
+      <p:sp>
+        <p:nvSpPr>
+          <p:cNvPr id="67" name="Text 47"/>
+          <p:cNvSpPr txBox="1"/>
+          <p:nvPr/>
+        </p:nvSpPr>
+        <p:spPr>
+          <a:xfrm>
+            <a:off x="8531805" y="2873756"/>
+            <a:ext cx="411987" cy="169037"/>
+          </a:xfrm>
+          <a:prstGeom prst="rect">
+            <a:avLst/>
+          </a:prstGeom>
+          <a:noFill/>
+          <a:ln/>
+        </p:spPr>
+        <p:txBody>
+          <a:bodyPr wrap="square" lIns="0" tIns="0" rIns="0" bIns="0" rtlCol="0" anchor="ctr"/>
+          <a:lstStyle/>
+          <a:p>
+            <a:pPr marL="0" indent="0" algn="ctr">
+              <a:lnSpc>
+                <a:spcPct val="92000"/>
+              </a:lnSpc>
+              <a:buNone/>
+            </a:pPr>
+            <a:r>
+              <a:rPr lang="en-US" sz="1100" dirty="0">
+                <a:solidFill>
+                  <a:srgbClr val="2B3644"/>
+                </a:solidFill>
+                <a:latin typeface="Arial" pitchFamily="34" charset="0"/>
+                <a:ea typeface="Arial" pitchFamily="34" charset="-122"/>
+                <a:cs typeface="Arial" pitchFamily="34" charset="-120"/>
+              </a:rPr>
+              <a:t>Lab 1</a:t>
+            </a:r>
+            <a:endParaRPr lang="en-US" sz="1100" dirty="0"/>
+          </a:p>
+        </p:txBody>
+      </p:sp>
+      <p:sp>
+        <p:nvSpPr>
+          <p:cNvPr id="68" name="Text 48"/>
+          <p:cNvSpPr txBox="1"/>
+          <p:nvPr/>
+        </p:nvSpPr>
+        <p:spPr>
+          <a:xfrm>
+            <a:off x="9684145" y="2873756"/>
+            <a:ext cx="411987" cy="169037"/>
+          </a:xfrm>
+          <a:prstGeom prst="rect">
+            <a:avLst/>
+          </a:prstGeom>
+          <a:noFill/>
+          <a:ln/>
+        </p:spPr>
+        <p:txBody>
+          <a:bodyPr wrap="square" lIns="0" tIns="0" rIns="0" bIns="0" rtlCol="0" anchor="ctr"/>
+          <a:lstStyle/>
+          <a:p>
+            <a:pPr marL="0" indent="0" algn="ctr">
+              <a:lnSpc>
+                <a:spcPct val="92000"/>
+              </a:lnSpc>
+              <a:buNone/>
+            </a:pPr>
+            <a:r>
+              <a:rPr lang="en-US" sz="1100" dirty="0">
+                <a:solidFill>
+                  <a:srgbClr val="2B3644"/>
+                </a:solidFill>
+                <a:latin typeface="Arial" pitchFamily="34" charset="0"/>
+                <a:ea typeface="Arial" pitchFamily="34" charset="-122"/>
+                <a:cs typeface="Arial" pitchFamily="34" charset="-120"/>
+              </a:rPr>
+              <a:t>Lab 2</a:t>
+            </a:r>
+            <a:endParaRPr lang="en-US" sz="1100" dirty="0"/>
+          </a:p>
+        </p:txBody>
+      </p:sp>
+      <p:sp>
+        <p:nvSpPr>
+          <p:cNvPr id="69" name="Text 49"/>
+          <p:cNvSpPr txBox="1"/>
+          <p:nvPr/>
+        </p:nvSpPr>
+        <p:spPr>
+          <a:xfrm>
+            <a:off x="11212845" y="2873756"/>
+            <a:ext cx="427494" cy="169037"/>
+          </a:xfrm>
+          <a:prstGeom prst="rect">
+            <a:avLst/>
+          </a:prstGeom>
+          <a:noFill/>
+          <a:ln/>
+        </p:spPr>
+        <p:txBody>
+          <a:bodyPr wrap="square" lIns="0" tIns="0" rIns="0" bIns="0" rtlCol="0" anchor="ctr"/>
+          <a:lstStyle/>
+          <a:p>
+            <a:pPr marL="0" indent="0" algn="ctr">
+              <a:lnSpc>
+                <a:spcPct val="92000"/>
+              </a:lnSpc>
+              <a:buNone/>
+            </a:pPr>
+            <a:r>
+              <a:rPr lang="en-US" sz="1100" dirty="0">
+                <a:solidFill>
+                  <a:srgbClr val="2B3644"/>
+                </a:solidFill>
+                <a:latin typeface="Arial" pitchFamily="34" charset="0"/>
+                <a:ea typeface="Arial" pitchFamily="34" charset="-122"/>
+                <a:cs typeface="Arial" pitchFamily="34" charset="-120"/>
+              </a:rPr>
+              <a:t>Lab K</a:t>
+            </a:r>
+            <a:endParaRPr lang="en-US" sz="1100" dirty="0"/>
+          </a:p>
+        </p:txBody>
+      </p:sp>
+      <p:sp>
+        <p:nvSpPr>
+          <p:cNvPr id="73" name="Text 53"/>
+          <p:cNvSpPr txBox="1"/>
+          <p:nvPr/>
+        </p:nvSpPr>
+        <p:spPr>
+          <a:xfrm>
+            <a:off x="8708137" y="4712500"/>
+            <a:ext cx="670735" cy="207455"/>
+          </a:xfrm>
+          <a:prstGeom prst="rect">
+            <a:avLst/>
+          </a:prstGeom>
+          <a:noFill/>
+          <a:ln/>
+        </p:spPr>
+        <p:txBody>
+          <a:bodyPr wrap="square" lIns="0" tIns="0" rIns="0" bIns="0" rtlCol="0" anchor="ctr"/>
+          <a:lstStyle/>
+          <a:p>
+            <a:pPr marL="0" indent="0" algn="ctr">
+              <a:lnSpc>
+                <a:spcPct val="92000"/>
+              </a:lnSpc>
+              <a:buNone/>
+            </a:pPr>
+            <a:r>
+              <a:rPr lang="en-US" altLang="zh-CN" sz="1600">
+                <a:solidFill>
+                  <a:srgbClr val="2B3644"/>
+                </a:solidFill>
+                <a:latin typeface="Arial" pitchFamily="34" charset="0"/>
+                <a:cs typeface="Arial" pitchFamily="34" charset="-120"/>
+              </a:rPr>
+              <a:t>Model</a:t>
+            </a:r>
+            <a:endParaRPr lang="en-US" altLang="zh-CN" sz="1600" dirty="0">
+              <a:solidFill>
+                <a:srgbClr val="2B3644"/>
+              </a:solidFill>
+              <a:latin typeface="Arial" pitchFamily="34" charset="0"/>
+              <a:cs typeface="Arial" pitchFamily="34" charset="-120"/>
+            </a:endParaRPr>
+          </a:p>
+        </p:txBody>
+      </p:sp>
+      <p:sp>
+        <p:nvSpPr>
+          <p:cNvPr id="74" name="Text 54"/>
+          <p:cNvSpPr txBox="1"/>
+          <p:nvPr/>
+        </p:nvSpPr>
+        <p:spPr>
+          <a:xfrm>
+            <a:off x="9381602" y="4715275"/>
+            <a:ext cx="2549511" cy="207455"/>
+          </a:xfrm>
+          <a:prstGeom prst="rect">
+            <a:avLst/>
+          </a:prstGeom>
+          <a:noFill/>
+          <a:ln/>
+        </p:spPr>
+        <p:txBody>
+          <a:bodyPr wrap="square" lIns="0" tIns="0" rIns="0" bIns="0" rtlCol="0" anchor="ctr"/>
+          <a:lstStyle/>
+          <a:p>
+            <a:pPr marL="0" indent="0" algn="ctr">
+              <a:lnSpc>
+                <a:spcPct val="92000"/>
+              </a:lnSpc>
+              <a:buNone/>
+            </a:pPr>
+            <a:r>
+              <a:rPr lang="en-US" sz="1350" dirty="0">
+                <a:solidFill>
+                  <a:srgbClr val="6E7B87"/>
+                </a:solidFill>
+                <a:latin typeface="Arial" pitchFamily="34" charset="0"/>
+                <a:ea typeface="Arial" pitchFamily="34" charset="-122"/>
+                <a:cs typeface="Arial" pitchFamily="34" charset="-120"/>
+              </a:rPr>
+              <a:t>(design revised between rounds)</a:t>
+            </a:r>
+            <a:endParaRPr lang="en-US" sz="1350" dirty="0"/>
+          </a:p>
+        </p:txBody>
+      </p:sp>
+      <p:sp>
+        <p:nvSpPr>
+          <p:cNvPr id="82" name="Shape 10">
+            <a:extLst>
+              <a:ext uri="{FF2B5EF4-FFF2-40B4-BE49-F238E27FC236}">
+                <a16:creationId xmlns:a16="http://schemas.microsoft.com/office/drawing/2014/main" id="{49011C04-2809-474A-9B8C-B035C6B3D8EE}"/>
+              </a:ext>
+            </a:extLst>
+          </p:cNvPr>
+          <p:cNvSpPr/>
+          <p:nvPr/>
+        </p:nvSpPr>
+        <p:spPr>
+          <a:xfrm flipV="1">
+            <a:off x="910729" y="2425360"/>
+            <a:ext cx="1097904" cy="530650"/>
+          </a:xfrm>
+          <a:prstGeom prst="line">
+            <a:avLst/>
+          </a:prstGeom>
+          <a:noFill/>
+          <a:ln w="30480">
+            <a:solidFill>
+              <a:srgbClr val="3F8F5C"/>
+            </a:solidFill>
+            <a:prstDash val="solid"/>
+            <a:headEnd type="none"/>
+            <a:tailEnd type="triangle"/>
+          </a:ln>
+        </p:spPr>
+      </p:sp>
+      <p:sp>
+        <p:nvSpPr>
+          <p:cNvPr id="85" name="Shape 13">
+            <a:extLst>
+              <a:ext uri="{FF2B5EF4-FFF2-40B4-BE49-F238E27FC236}">
+                <a16:creationId xmlns:a16="http://schemas.microsoft.com/office/drawing/2014/main" id="{A7FECB0A-A5F4-4844-BDE2-F8B3B052194F}"/>
+              </a:ext>
+            </a:extLst>
+          </p:cNvPr>
+          <p:cNvSpPr/>
+          <p:nvPr/>
+        </p:nvSpPr>
+        <p:spPr>
+          <a:xfrm>
+            <a:off x="2410676" y="2425360"/>
+            <a:ext cx="417658" cy="556992"/>
+          </a:xfrm>
+          <a:prstGeom prst="line">
+            <a:avLst/>
+          </a:prstGeom>
+          <a:noFill/>
+          <a:ln w="30480">
+            <a:solidFill>
+              <a:srgbClr val="3F8F5C"/>
+            </a:solidFill>
+            <a:prstDash val="solid"/>
+            <a:headEnd type="none"/>
+            <a:tailEnd type="triangle"/>
+          </a:ln>
+        </p:spPr>
+      </p:sp>
+      <p:pic>
+        <p:nvPicPr>
+          <p:cNvPr id="89" name="Image 10" descr="/liziqing/yukai/AI4AI4Cell/paradigm_figure_icons/loop_c.png">
+            <a:extLst>
+              <a:ext uri="{FF2B5EF4-FFF2-40B4-BE49-F238E27FC236}">
+                <a16:creationId xmlns:a16="http://schemas.microsoft.com/office/drawing/2014/main" id="{D8A2A58A-70DA-4BD6-9878-5AF417DA36BD}"/>
+              </a:ext>
+            </a:extLst>
+          </p:cNvPr>
+          <p:cNvPicPr>
+            <a:picLocks noChangeAspect="1"/>
+          </p:cNvPicPr>
+          <p:nvPr/>
+        </p:nvPicPr>
+        <p:blipFill>
+          <a:blip r:embed="rId17"/>
+          <a:stretch>
+            <a:fillRect/>
+          </a:stretch>
+        </p:blipFill>
+        <p:spPr>
+          <a:xfrm>
+            <a:off x="1681733" y="1484079"/>
+            <a:ext cx="1089592" cy="861129"/>
+          </a:xfrm>
+          <a:prstGeom prst="rect">
+            <a:avLst/>
+          </a:prstGeom>
+        </p:spPr>
+      </p:pic>
+      <p:pic>
+        <p:nvPicPr>
+          <p:cNvPr id="96" name="Image 17" descr="/liziqing/yukai/AI4AI4Cell/paradigm_figure_icons/net_c.png">
+            <a:extLst>
+              <a:ext uri="{FF2B5EF4-FFF2-40B4-BE49-F238E27FC236}">
+                <a16:creationId xmlns:a16="http://schemas.microsoft.com/office/drawing/2014/main" id="{9F28F0CF-6AC8-4164-BBAD-AFF35D0A2B84}"/>
+              </a:ext>
+            </a:extLst>
+          </p:cNvPr>
+          <p:cNvPicPr>
+            <a:picLocks noChangeAspect="1"/>
+          </p:cNvPicPr>
+          <p:nvPr/>
+        </p:nvPicPr>
+        <p:blipFill>
+          <a:blip r:embed="rId16"/>
+          <a:stretch>
+            <a:fillRect/>
+          </a:stretch>
+        </p:blipFill>
+        <p:spPr>
+          <a:xfrm>
+            <a:off x="2666750" y="2973650"/>
+            <a:ext cx="1028819" cy="903075"/>
+          </a:xfrm>
+          <a:prstGeom prst="rect">
+            <a:avLst/>
+          </a:prstGeom>
+        </p:spPr>
+      </p:pic>
+      <p:sp>
+        <p:nvSpPr>
+          <p:cNvPr id="97" name="Text 43">
+            <a:extLst>
+              <a:ext uri="{FF2B5EF4-FFF2-40B4-BE49-F238E27FC236}">
+                <a16:creationId xmlns:a16="http://schemas.microsoft.com/office/drawing/2014/main" id="{DA964F40-5814-4C93-8838-6A42BBCD8B8E}"/>
+              </a:ext>
+            </a:extLst>
+          </p:cNvPr>
+          <p:cNvSpPr txBox="1"/>
+          <p:nvPr/>
+        </p:nvSpPr>
+        <p:spPr>
+          <a:xfrm>
+            <a:off x="1047976" y="1216703"/>
+            <a:ext cx="2167835" cy="234031"/>
+          </a:xfrm>
+          <a:prstGeom prst="rect">
+            <a:avLst/>
+          </a:prstGeom>
+          <a:noFill/>
+          <a:ln/>
+        </p:spPr>
+        <p:txBody>
+          <a:bodyPr wrap="square" lIns="0" tIns="0" rIns="0" bIns="0" rtlCol="0" anchor="ctr"/>
+          <a:lstStyle/>
+          <a:p>
+            <a:pPr marL="0" indent="0" algn="ctr">
+              <a:lnSpc>
+                <a:spcPct val="92000"/>
+              </a:lnSpc>
+              <a:buNone/>
+            </a:pPr>
+            <a:r>
+              <a:rPr lang="en-US" sz="1600" dirty="0">
+                <a:solidFill>
+                  <a:srgbClr val="2B3644"/>
+                </a:solidFill>
+                <a:latin typeface="Arial" pitchFamily="34" charset="0"/>
+                <a:ea typeface="Arial" pitchFamily="34" charset="-122"/>
+                <a:cs typeface="Arial" pitchFamily="34" charset="-120"/>
+              </a:rPr>
+              <a:t>Research / design loop</a:t>
+            </a:r>
+            <a:endParaRPr lang="en-US" sz="1600" dirty="0"/>
+          </a:p>
+        </p:txBody>
+      </p:sp>
+      <p:sp>
+        <p:nvSpPr>
+          <p:cNvPr id="98" name="Text 45">
+            <a:extLst>
+              <a:ext uri="{FF2B5EF4-FFF2-40B4-BE49-F238E27FC236}">
+                <a16:creationId xmlns:a16="http://schemas.microsoft.com/office/drawing/2014/main" id="{C69DC5DB-7CBC-4C75-A664-5ED9842FBE80}"/>
+              </a:ext>
+            </a:extLst>
+          </p:cNvPr>
+          <p:cNvSpPr txBox="1"/>
+          <p:nvPr/>
+        </p:nvSpPr>
+        <p:spPr>
+          <a:xfrm>
+            <a:off x="-8867" y="2407720"/>
+            <a:ext cx="1720979" cy="338074"/>
+          </a:xfrm>
+          <a:prstGeom prst="rect">
+            <a:avLst/>
+          </a:prstGeom>
+          <a:noFill/>
+          <a:ln/>
+        </p:spPr>
+        <p:txBody>
+          <a:bodyPr wrap="square" lIns="0" tIns="0" rIns="0" bIns="0" rtlCol="0" anchor="ctr"/>
+          <a:lstStyle/>
+          <a:p>
+            <a:pPr marL="0" indent="0" algn="ctr">
+              <a:lnSpc>
+                <a:spcPct val="92000"/>
+              </a:lnSpc>
+              <a:buNone/>
+            </a:pPr>
+            <a:r>
+              <a:rPr lang="en-US" sz="1200">
+                <a:solidFill>
+                  <a:srgbClr val="3F8F5C"/>
+                </a:solidFill>
+                <a:latin typeface="Arial" pitchFamily="34" charset="0"/>
+                <a:ea typeface="Arial" pitchFamily="34" charset="-122"/>
+                <a:cs typeface="Arial" pitchFamily="34" charset="-120"/>
+              </a:rPr>
+              <a:t>Aggregate</a:t>
+            </a:r>
+            <a:r>
+              <a:rPr lang="en-US" sz="1200" dirty="0">
+                <a:solidFill>
+                  <a:srgbClr val="3F8F5C"/>
+                </a:solidFill>
+              </a:rPr>
+              <a:t> </a:t>
+            </a:r>
+            <a:r>
+              <a:rPr lang="en-US" sz="1200">
+                <a:solidFill>
+                  <a:srgbClr val="3F8F5C"/>
+                </a:solidFill>
+                <a:latin typeface="Arial" pitchFamily="34" charset="0"/>
+                <a:ea typeface="Arial" pitchFamily="34" charset="-122"/>
+                <a:cs typeface="Arial" pitchFamily="34" charset="-120"/>
+              </a:rPr>
+              <a:t>development </a:t>
+            </a:r>
+            <a:r>
+              <a:rPr lang="en-US" sz="1200" dirty="0">
+                <a:solidFill>
+                  <a:srgbClr val="3F8F5C"/>
+                </a:solidFill>
+                <a:latin typeface="Arial" pitchFamily="34" charset="0"/>
+                <a:ea typeface="Arial" pitchFamily="34" charset="-122"/>
+                <a:cs typeface="Arial" pitchFamily="34" charset="-120"/>
+              </a:rPr>
+              <a:t>evidence</a:t>
+            </a:r>
+            <a:endParaRPr lang="en-US" sz="1200" dirty="0">
+              <a:solidFill>
+                <a:srgbClr val="3F8F5C"/>
+              </a:solidFill>
+            </a:endParaRPr>
+          </a:p>
+        </p:txBody>
+      </p:sp>
+      <p:sp>
+        <p:nvSpPr>
+          <p:cNvPr id="102" name="Text 53">
+            <a:extLst>
+              <a:ext uri="{FF2B5EF4-FFF2-40B4-BE49-F238E27FC236}">
+                <a16:creationId xmlns:a16="http://schemas.microsoft.com/office/drawing/2014/main" id="{A5AF9A12-7215-4A9F-B4EA-7F5A22B7332E}"/>
+              </a:ext>
+            </a:extLst>
+          </p:cNvPr>
+          <p:cNvSpPr txBox="1"/>
+          <p:nvPr/>
+        </p:nvSpPr>
+        <p:spPr>
+          <a:xfrm>
+            <a:off x="2535652" y="3915934"/>
+            <a:ext cx="1377308" cy="207455"/>
+          </a:xfrm>
+          <a:prstGeom prst="rect">
+            <a:avLst/>
+          </a:prstGeom>
+          <a:noFill/>
+          <a:ln/>
+        </p:spPr>
+        <p:txBody>
+          <a:bodyPr wrap="square" lIns="0" tIns="0" rIns="0" bIns="0" rtlCol="0" anchor="ctr"/>
+          <a:lstStyle/>
+          <a:p>
+            <a:pPr marL="0" indent="0" algn="ctr">
+              <a:lnSpc>
+                <a:spcPct val="92000"/>
+              </a:lnSpc>
+              <a:buNone/>
+            </a:pPr>
+            <a:r>
+              <a:rPr lang="en-US" altLang="zh-CN" sz="1600">
+                <a:solidFill>
+                  <a:srgbClr val="2B3644"/>
+                </a:solidFill>
+                <a:latin typeface="Arial" pitchFamily="34" charset="0"/>
+                <a:cs typeface="Arial" pitchFamily="34" charset="-120"/>
+              </a:rPr>
+              <a:t>Model</a:t>
+            </a:r>
+            <a:endParaRPr lang="en-US" sz="1600" dirty="0">
+              <a:solidFill>
+                <a:srgbClr val="2B3644"/>
+              </a:solidFill>
+              <a:latin typeface="Arial" pitchFamily="34" charset="0"/>
+              <a:cs typeface="Arial" pitchFamily="34" charset="-120"/>
+            </a:endParaRPr>
+          </a:p>
+        </p:txBody>
+      </p:sp>
+      <p:sp>
+        <p:nvSpPr>
+          <p:cNvPr id="103" name="Text 54">
+            <a:extLst>
+              <a:ext uri="{FF2B5EF4-FFF2-40B4-BE49-F238E27FC236}">
+                <a16:creationId xmlns:a16="http://schemas.microsoft.com/office/drawing/2014/main" id="{D6A70366-2B45-47C8-9347-281E35581F77}"/>
+              </a:ext>
+            </a:extLst>
+          </p:cNvPr>
+          <p:cNvSpPr txBox="1"/>
+          <p:nvPr/>
+        </p:nvSpPr>
+        <p:spPr>
+          <a:xfrm>
+            <a:off x="1538134" y="4175284"/>
+            <a:ext cx="2549511" cy="207455"/>
+          </a:xfrm>
+          <a:prstGeom prst="rect">
+            <a:avLst/>
+          </a:prstGeom>
+          <a:noFill/>
+          <a:ln/>
+        </p:spPr>
+        <p:txBody>
+          <a:bodyPr wrap="square" lIns="0" tIns="0" rIns="0" bIns="0" rtlCol="0" anchor="ctr"/>
+          <a:lstStyle/>
+          <a:p>
+            <a:pPr marL="0" indent="0" algn="ctr">
+              <a:lnSpc>
+                <a:spcPct val="92000"/>
+              </a:lnSpc>
+              <a:buNone/>
+            </a:pPr>
+            <a:r>
+              <a:rPr lang="en-US" sz="1350" dirty="0">
+                <a:solidFill>
+                  <a:srgbClr val="6E7B87"/>
+                </a:solidFill>
+                <a:latin typeface="Arial" pitchFamily="34" charset="0"/>
+                <a:ea typeface="Arial" pitchFamily="34" charset="-122"/>
+                <a:cs typeface="Arial" pitchFamily="34" charset="-120"/>
+              </a:rPr>
+              <a:t>(design revised between rounds)</a:t>
+            </a:r>
+            <a:endParaRPr lang="en-US" sz="1350" dirty="0"/>
+          </a:p>
+        </p:txBody>
+      </p:sp>
+      <p:sp>
+        <p:nvSpPr>
+          <p:cNvPr id="104" name="Shape 13">
+            <a:extLst>
+              <a:ext uri="{FF2B5EF4-FFF2-40B4-BE49-F238E27FC236}">
+                <a16:creationId xmlns:a16="http://schemas.microsoft.com/office/drawing/2014/main" id="{720BE142-ED5B-4CA3-BFC3-A6CFED1EBC2D}"/>
+              </a:ext>
+            </a:extLst>
+          </p:cNvPr>
+          <p:cNvSpPr/>
+          <p:nvPr/>
+        </p:nvSpPr>
+        <p:spPr>
+          <a:xfrm>
+            <a:off x="1452133" y="3315525"/>
+            <a:ext cx="1169350" cy="0"/>
+          </a:xfrm>
+          <a:prstGeom prst="line">
+            <a:avLst/>
+          </a:prstGeom>
+          <a:noFill/>
+          <a:ln w="30480">
+            <a:solidFill>
+              <a:schemeClr val="accent1"/>
+            </a:solidFill>
+            <a:prstDash val="solid"/>
+            <a:headEnd type="none"/>
+            <a:tailEnd type="triangle"/>
+          </a:ln>
+        </p:spPr>
+      </p:sp>
+      <p:sp>
+        <p:nvSpPr>
+          <p:cNvPr id="105" name="Shape 10">
+            <a:extLst>
+              <a:ext uri="{FF2B5EF4-FFF2-40B4-BE49-F238E27FC236}">
+                <a16:creationId xmlns:a16="http://schemas.microsoft.com/office/drawing/2014/main" id="{15944F5E-0465-44E0-A622-314EE18BEA7A}"/>
+              </a:ext>
+            </a:extLst>
+          </p:cNvPr>
+          <p:cNvSpPr/>
+          <p:nvPr/>
+        </p:nvSpPr>
+        <p:spPr>
+          <a:xfrm flipH="1">
+            <a:off x="1452133" y="3464834"/>
+            <a:ext cx="1164836" cy="0"/>
+          </a:xfrm>
+          <a:prstGeom prst="line">
+            <a:avLst/>
+          </a:prstGeom>
+          <a:noFill/>
+          <a:ln w="30480">
+            <a:solidFill>
+              <a:srgbClr val="3F8F5C"/>
+            </a:solidFill>
+            <a:prstDash val="solid"/>
+            <a:headEnd type="none"/>
+            <a:tailEnd type="triangle"/>
+          </a:ln>
+        </p:spPr>
+      </p:sp>
+      <p:sp>
+        <p:nvSpPr>
+          <p:cNvPr id="106" name="Text 45">
+            <a:extLst>
+              <a:ext uri="{FF2B5EF4-FFF2-40B4-BE49-F238E27FC236}">
+                <a16:creationId xmlns:a16="http://schemas.microsoft.com/office/drawing/2014/main" id="{FA1CEE2C-59D1-4909-8760-7087F81DACA7}"/>
+              </a:ext>
+            </a:extLst>
+          </p:cNvPr>
+          <p:cNvSpPr txBox="1"/>
+          <p:nvPr/>
+        </p:nvSpPr>
+        <p:spPr>
+          <a:xfrm>
+            <a:off x="1476410" y="3575980"/>
+            <a:ext cx="1196083" cy="243415"/>
+          </a:xfrm>
+          <a:prstGeom prst="rect">
+            <a:avLst/>
+          </a:prstGeom>
+          <a:noFill/>
+          <a:ln/>
+        </p:spPr>
+        <p:txBody>
+          <a:bodyPr wrap="square" lIns="0" tIns="0" rIns="0" bIns="0" rtlCol="0" anchor="ctr"/>
+          <a:lstStyle/>
+          <a:p>
+            <a:pPr marL="0" indent="0" algn="ctr">
+              <a:lnSpc>
+                <a:spcPct val="92000"/>
+              </a:lnSpc>
+              <a:buNone/>
+            </a:pPr>
+            <a:r>
+              <a:rPr lang="en-US" sz="1400">
+                <a:solidFill>
+                  <a:srgbClr val="3F8F5C"/>
+                </a:solidFill>
+                <a:latin typeface="Arial" pitchFamily="34" charset="0"/>
+                <a:ea typeface="Arial" pitchFamily="34" charset="-122"/>
+                <a:cs typeface="Arial" pitchFamily="34" charset="-120"/>
+              </a:rPr>
+              <a:t>model parameters </a:t>
+            </a:r>
+          </a:p>
+        </p:txBody>
+      </p:sp>
+      <p:sp>
+        <p:nvSpPr>
+          <p:cNvPr id="107" name="Text 45">
+            <a:extLst>
+              <a:ext uri="{FF2B5EF4-FFF2-40B4-BE49-F238E27FC236}">
+                <a16:creationId xmlns:a16="http://schemas.microsoft.com/office/drawing/2014/main" id="{168FDA53-4230-4EDE-9FED-DBEC6B184C0A}"/>
+              </a:ext>
+            </a:extLst>
+          </p:cNvPr>
+          <p:cNvSpPr txBox="1"/>
+          <p:nvPr/>
+        </p:nvSpPr>
+        <p:spPr>
+          <a:xfrm>
+            <a:off x="1503771" y="3008344"/>
+            <a:ext cx="1089592" cy="193929"/>
+          </a:xfrm>
+          <a:prstGeom prst="rect">
+            <a:avLst/>
+          </a:prstGeom>
+          <a:noFill/>
+          <a:ln/>
+        </p:spPr>
+        <p:txBody>
+          <a:bodyPr wrap="square" lIns="0" tIns="0" rIns="0" bIns="0" rtlCol="0" anchor="ctr"/>
+          <a:lstStyle/>
+          <a:p>
+            <a:pPr marL="0" indent="0" algn="ctr">
+              <a:lnSpc>
+                <a:spcPct val="92000"/>
+              </a:lnSpc>
+              <a:buNone/>
+            </a:pPr>
+            <a:r>
+              <a:rPr lang="en-US" sz="1400">
+                <a:solidFill>
+                  <a:srgbClr val="4472C4"/>
+                </a:solidFill>
+                <a:latin typeface="Arial" pitchFamily="34" charset="0"/>
+                <a:ea typeface="Arial" pitchFamily="34" charset="-122"/>
+                <a:cs typeface="Arial" pitchFamily="34" charset="-120"/>
+              </a:rPr>
+              <a:t>Accessible data</a:t>
+            </a:r>
+          </a:p>
+        </p:txBody>
+      </p:sp>
+      <p:sp>
+        <p:nvSpPr>
+          <p:cNvPr id="108" name="Text 44">
+            <a:extLst>
+              <a:ext uri="{FF2B5EF4-FFF2-40B4-BE49-F238E27FC236}">
+                <a16:creationId xmlns:a16="http://schemas.microsoft.com/office/drawing/2014/main" id="{0E62FE48-8E2A-4075-9700-ADA267EDC277}"/>
+              </a:ext>
+            </a:extLst>
+          </p:cNvPr>
+          <p:cNvSpPr txBox="1"/>
+          <p:nvPr/>
+        </p:nvSpPr>
+        <p:spPr>
+          <a:xfrm>
+            <a:off x="2646284" y="2496197"/>
+            <a:ext cx="793817" cy="338074"/>
+          </a:xfrm>
+          <a:prstGeom prst="rect">
+            <a:avLst/>
+          </a:prstGeom>
+          <a:noFill/>
+          <a:ln/>
+        </p:spPr>
+        <p:txBody>
+          <a:bodyPr wrap="square" lIns="0" tIns="0" rIns="0" bIns="0" rtlCol="0" anchor="ctr"/>
+          <a:lstStyle/>
+          <a:p>
+            <a:pPr marL="0" indent="0" algn="ctr">
+              <a:lnSpc>
+                <a:spcPct val="92000"/>
+              </a:lnSpc>
+              <a:buNone/>
+            </a:pPr>
+            <a:r>
+              <a:rPr lang="en-US" sz="1200" dirty="0">
+                <a:solidFill>
+                  <a:srgbClr val="3F8F5C"/>
+                </a:solidFill>
+                <a:latin typeface="Arial" pitchFamily="34" charset="0"/>
+                <a:ea typeface="Arial" pitchFamily="34" charset="-122"/>
+                <a:cs typeface="Arial" pitchFamily="34" charset="-120"/>
+              </a:rPr>
+              <a:t>Design</a:t>
+            </a:r>
+            <a:endParaRPr lang="en-US" sz="1200" dirty="0">
+              <a:solidFill>
+                <a:srgbClr val="3F8F5C"/>
+              </a:solidFill>
+            </a:endParaRPr>
+          </a:p>
+          <a:p>
+            <a:pPr marL="0" indent="0" algn="ctr">
+              <a:lnSpc>
+                <a:spcPct val="92000"/>
+              </a:lnSpc>
+              <a:buNone/>
+            </a:pPr>
+            <a:r>
+              <a:rPr lang="en-US" sz="1200" dirty="0">
+                <a:solidFill>
+                  <a:srgbClr val="3F8F5C"/>
+                </a:solidFill>
+                <a:latin typeface="Arial" pitchFamily="34" charset="0"/>
+                <a:ea typeface="Arial" pitchFamily="34" charset="-122"/>
+                <a:cs typeface="Arial" pitchFamily="34" charset="-120"/>
+              </a:rPr>
+              <a:t>revision</a:t>
+            </a:r>
+            <a:endParaRPr lang="en-US" sz="1200" dirty="0">
+              <a:solidFill>
+                <a:srgbClr val="3F8F5C"/>
+              </a:solidFill>
+            </a:endParaRPr>
+          </a:p>
+        </p:txBody>
+      </p:sp>
+      <p:sp>
+        <p:nvSpPr>
+          <p:cNvPr id="109" name="Shape 4">
+            <a:extLst>
+              <a:ext uri="{FF2B5EF4-FFF2-40B4-BE49-F238E27FC236}">
+                <a16:creationId xmlns:a16="http://schemas.microsoft.com/office/drawing/2014/main" id="{EE78043A-FE46-4123-894E-B11680A05446}"/>
+              </a:ext>
+            </a:extLst>
+          </p:cNvPr>
+          <p:cNvSpPr/>
+          <p:nvPr/>
+        </p:nvSpPr>
+        <p:spPr>
+          <a:xfrm>
+            <a:off x="8636929" y="3046750"/>
+            <a:ext cx="966099" cy="656751"/>
+          </a:xfrm>
+          <a:prstGeom prst="line">
+            <a:avLst/>
+          </a:prstGeom>
+          <a:noFill/>
+          <a:ln w="30480">
+            <a:solidFill>
+              <a:schemeClr val="accent1"/>
+            </a:solidFill>
+            <a:prstDash val="solid"/>
+            <a:headEnd type="none"/>
+            <a:tailEnd type="triangle"/>
+          </a:ln>
+        </p:spPr>
+      </p:sp>
+      <p:sp>
+        <p:nvSpPr>
+          <p:cNvPr id="110" name="Shape 5">
+            <a:extLst>
+              <a:ext uri="{FF2B5EF4-FFF2-40B4-BE49-F238E27FC236}">
+                <a16:creationId xmlns:a16="http://schemas.microsoft.com/office/drawing/2014/main" id="{9EBB9B59-88AC-4AAB-9511-2361BAE49417}"/>
+              </a:ext>
+            </a:extLst>
+          </p:cNvPr>
+          <p:cNvSpPr/>
+          <p:nvPr/>
+        </p:nvSpPr>
+        <p:spPr>
+          <a:xfrm>
+            <a:off x="9835578" y="3046751"/>
+            <a:ext cx="0" cy="656751"/>
+          </a:xfrm>
+          <a:prstGeom prst="line">
+            <a:avLst/>
+          </a:prstGeom>
+          <a:noFill/>
+          <a:ln w="30480">
+            <a:solidFill>
+              <a:schemeClr val="accent1"/>
+            </a:solidFill>
+            <a:prstDash val="solid"/>
+            <a:headEnd type="none"/>
+            <a:tailEnd type="triangle"/>
+          </a:ln>
+        </p:spPr>
+      </p:sp>
+      <p:sp>
+        <p:nvSpPr>
+          <p:cNvPr id="111" name="Shape 6">
+            <a:extLst>
+              <a:ext uri="{FF2B5EF4-FFF2-40B4-BE49-F238E27FC236}">
+                <a16:creationId xmlns:a16="http://schemas.microsoft.com/office/drawing/2014/main" id="{96B550B7-22C6-4D16-892C-201CEFA4A649}"/>
+              </a:ext>
+            </a:extLst>
+          </p:cNvPr>
+          <p:cNvSpPr/>
+          <p:nvPr/>
+        </p:nvSpPr>
+        <p:spPr>
+          <a:xfrm flipH="1">
+            <a:off x="10268509" y="3045510"/>
+            <a:ext cx="1059446" cy="624203"/>
+          </a:xfrm>
+          <a:prstGeom prst="line">
+            <a:avLst/>
+          </a:prstGeom>
+          <a:noFill/>
+          <a:ln w="30480">
+            <a:solidFill>
+              <a:schemeClr val="accent1"/>
+            </a:solidFill>
+            <a:prstDash val="solid"/>
+            <a:headEnd type="none"/>
+            <a:tailEnd type="triangle"/>
+          </a:ln>
+        </p:spPr>
+      </p:sp>
+      <p:sp>
+        <p:nvSpPr>
+          <p:cNvPr id="112" name="Text 38">
+            <a:extLst>
+              <a:ext uri="{FF2B5EF4-FFF2-40B4-BE49-F238E27FC236}">
+                <a16:creationId xmlns:a16="http://schemas.microsoft.com/office/drawing/2014/main" id="{E4AA127B-9121-40AC-B8C9-CD5117657625}"/>
+              </a:ext>
+            </a:extLst>
+          </p:cNvPr>
+          <p:cNvSpPr txBox="1"/>
+          <p:nvPr/>
+        </p:nvSpPr>
+        <p:spPr>
+          <a:xfrm>
+            <a:off x="8220157" y="3268105"/>
             <a:ext cx="1249149" cy="384175"/>
           </a:xfrm>
           <a:prstGeom prst="rect">
@@ -1888,416 +2858,10 @@
       </p:sp>
       <p:sp>
         <p:nvSpPr>
-          <p:cNvPr id="61" name="Text 41"/>
-          <p:cNvSpPr txBox="1"/>
-          <p:nvPr/>
-        </p:nvSpPr>
-        <p:spPr>
-          <a:xfrm>
-            <a:off x="5291136" y="5178170"/>
-            <a:ext cx="1377308" cy="207455"/>
-          </a:xfrm>
-          <a:prstGeom prst="rect">
-            <a:avLst/>
-          </a:prstGeom>
-          <a:noFill/>
-          <a:ln/>
-        </p:spPr>
-        <p:txBody>
-          <a:bodyPr wrap="square" lIns="0" tIns="0" rIns="0" bIns="0" rtlCol="0" anchor="ctr"/>
-          <a:lstStyle/>
-          <a:p>
-            <a:pPr marL="0" indent="0" algn="ctr">
-              <a:lnSpc>
-                <a:spcPct val="92000"/>
-              </a:lnSpc>
-              <a:buNone/>
-            </a:pPr>
-            <a:r>
-              <a:rPr lang="en-US" altLang="zh-CN" sz="1350" b="1">
-                <a:solidFill>
-                  <a:srgbClr val="1F2A37"/>
-                </a:solidFill>
-                <a:latin typeface="Arial" pitchFamily="34" charset="0"/>
-                <a:ea typeface="Arial" pitchFamily="34" charset="-122"/>
-                <a:cs typeface="Arial" pitchFamily="34" charset="-120"/>
-              </a:rPr>
-              <a:t>Model</a:t>
-            </a:r>
-            <a:endParaRPr lang="en-US" altLang="zh-CN" sz="1350" dirty="0"/>
-          </a:p>
-        </p:txBody>
-      </p:sp>
-      <p:sp>
-        <p:nvSpPr>
-          <p:cNvPr id="62" name="Text 42"/>
-          <p:cNvSpPr txBox="1"/>
-          <p:nvPr/>
-        </p:nvSpPr>
-        <p:spPr>
-          <a:xfrm>
-            <a:off x="5001888" y="5378034"/>
-            <a:ext cx="1968296" cy="207455"/>
-          </a:xfrm>
-          <a:prstGeom prst="rect">
-            <a:avLst/>
-          </a:prstGeom>
-          <a:noFill/>
-          <a:ln/>
-        </p:spPr>
-        <p:txBody>
-          <a:bodyPr wrap="square" lIns="0" tIns="0" rIns="0" bIns="0" rtlCol="0" anchor="ctr"/>
-          <a:lstStyle/>
-          <a:p>
-            <a:pPr marL="0" indent="0" algn="ctr">
-              <a:lnSpc>
-                <a:spcPct val="92000"/>
-              </a:lnSpc>
-              <a:buNone/>
-            </a:pPr>
-            <a:r>
-              <a:rPr lang="en-US" sz="1350" dirty="0">
-                <a:solidFill>
-                  <a:srgbClr val="6E7B87"/>
-                </a:solidFill>
-                <a:latin typeface="Arial" pitchFamily="34" charset="0"/>
-                <a:ea typeface="Arial" pitchFamily="34" charset="-122"/>
-                <a:cs typeface="Arial" pitchFamily="34" charset="-120"/>
-              </a:rPr>
-              <a:t>(design fixed in advance)</a:t>
-            </a:r>
-            <a:endParaRPr lang="en-US" sz="1350" dirty="0"/>
-          </a:p>
-        </p:txBody>
-      </p:sp>
-      <p:sp>
-        <p:nvSpPr>
-          <p:cNvPr id="63" name="Text 43"/>
-          <p:cNvSpPr txBox="1"/>
-          <p:nvPr/>
-        </p:nvSpPr>
-        <p:spPr>
-          <a:xfrm>
-            <a:off x="9454392" y="781731"/>
-            <a:ext cx="1945760" cy="222822"/>
-          </a:xfrm>
-          <a:prstGeom prst="rect">
-            <a:avLst/>
-          </a:prstGeom>
-          <a:noFill/>
-          <a:ln/>
-        </p:spPr>
-        <p:txBody>
-          <a:bodyPr wrap="square" lIns="0" tIns="0" rIns="0" bIns="0" rtlCol="0" anchor="ctr"/>
-          <a:lstStyle/>
-          <a:p>
-            <a:pPr marL="0" indent="0" algn="ctr">
-              <a:lnSpc>
-                <a:spcPct val="92000"/>
-              </a:lnSpc>
-              <a:buNone/>
-            </a:pPr>
-            <a:r>
-              <a:rPr lang="en-US" sz="1450" dirty="0">
-                <a:solidFill>
-                  <a:srgbClr val="2B3644"/>
-                </a:solidFill>
-                <a:latin typeface="Arial" pitchFamily="34" charset="0"/>
-                <a:ea typeface="Arial" pitchFamily="34" charset="-122"/>
-                <a:cs typeface="Arial" pitchFamily="34" charset="-120"/>
-              </a:rPr>
-              <a:t>Research / design loop</a:t>
-            </a:r>
-            <a:endParaRPr lang="en-US" sz="1450" dirty="0"/>
-          </a:p>
-        </p:txBody>
-      </p:sp>
-      <p:sp>
-        <p:nvSpPr>
-          <p:cNvPr id="64" name="Text 44"/>
-          <p:cNvSpPr txBox="1"/>
-          <p:nvPr/>
-        </p:nvSpPr>
-        <p:spPr>
-          <a:xfrm>
-            <a:off x="11251469" y="1307881"/>
-            <a:ext cx="780719" cy="338074"/>
-          </a:xfrm>
-          <a:prstGeom prst="rect">
-            <a:avLst/>
-          </a:prstGeom>
-          <a:noFill/>
-          <a:ln/>
-        </p:spPr>
-        <p:txBody>
-          <a:bodyPr wrap="square" lIns="0" tIns="0" rIns="0" bIns="0" rtlCol="0" anchor="ctr"/>
-          <a:lstStyle/>
-          <a:p>
-            <a:pPr marL="0" indent="0" algn="ctr">
-              <a:lnSpc>
-                <a:spcPct val="92000"/>
-              </a:lnSpc>
-              <a:buNone/>
-            </a:pPr>
-            <a:r>
-              <a:rPr lang="en-US" sz="1100" dirty="0">
-                <a:solidFill>
-                  <a:srgbClr val="3F8F5C"/>
-                </a:solidFill>
-                <a:latin typeface="Arial" pitchFamily="34" charset="0"/>
-                <a:ea typeface="Arial" pitchFamily="34" charset="-122"/>
-                <a:cs typeface="Arial" pitchFamily="34" charset="-120"/>
-              </a:rPr>
-              <a:t>Design</a:t>
-            </a:r>
-            <a:endParaRPr lang="en-US" sz="1100" dirty="0">
-              <a:solidFill>
-                <a:srgbClr val="3F8F5C"/>
-              </a:solidFill>
-            </a:endParaRPr>
-          </a:p>
-          <a:p>
-            <a:pPr marL="0" indent="0" algn="ctr">
-              <a:lnSpc>
-                <a:spcPct val="92000"/>
-              </a:lnSpc>
-              <a:buNone/>
-            </a:pPr>
-            <a:r>
-              <a:rPr lang="en-US" sz="1100" dirty="0">
-                <a:solidFill>
-                  <a:srgbClr val="3F8F5C"/>
-                </a:solidFill>
-                <a:latin typeface="Arial" pitchFamily="34" charset="0"/>
-                <a:ea typeface="Arial" pitchFamily="34" charset="-122"/>
-                <a:cs typeface="Arial" pitchFamily="34" charset="-120"/>
-              </a:rPr>
-              <a:t>revision</a:t>
-            </a:r>
-            <a:endParaRPr lang="en-US" sz="1100" dirty="0">
-              <a:solidFill>
-                <a:srgbClr val="3F8F5C"/>
-              </a:solidFill>
-            </a:endParaRPr>
-          </a:p>
-        </p:txBody>
-      </p:sp>
-      <p:sp>
-        <p:nvSpPr>
-          <p:cNvPr id="67" name="Text 47"/>
-          <p:cNvSpPr txBox="1"/>
-          <p:nvPr/>
-        </p:nvSpPr>
-        <p:spPr>
-          <a:xfrm>
-            <a:off x="8531805" y="3769106"/>
-            <a:ext cx="411987" cy="169037"/>
-          </a:xfrm>
-          <a:prstGeom prst="rect">
-            <a:avLst/>
-          </a:prstGeom>
-          <a:noFill/>
-          <a:ln/>
-        </p:spPr>
-        <p:txBody>
-          <a:bodyPr wrap="square" lIns="0" tIns="0" rIns="0" bIns="0" rtlCol="0" anchor="ctr"/>
-          <a:lstStyle/>
-          <a:p>
-            <a:pPr marL="0" indent="0" algn="ctr">
-              <a:lnSpc>
-                <a:spcPct val="92000"/>
-              </a:lnSpc>
-              <a:buNone/>
-            </a:pPr>
-            <a:r>
-              <a:rPr lang="en-US" sz="1100" dirty="0">
-                <a:solidFill>
-                  <a:srgbClr val="2B3644"/>
-                </a:solidFill>
-                <a:latin typeface="Arial" pitchFamily="34" charset="0"/>
-                <a:ea typeface="Arial" pitchFamily="34" charset="-122"/>
-                <a:cs typeface="Arial" pitchFamily="34" charset="-120"/>
-              </a:rPr>
-              <a:t>Lab 1</a:t>
-            </a:r>
-            <a:endParaRPr lang="en-US" sz="1100" dirty="0"/>
-          </a:p>
-        </p:txBody>
-      </p:sp>
-      <p:sp>
-        <p:nvSpPr>
-          <p:cNvPr id="68" name="Text 48"/>
-          <p:cNvSpPr txBox="1"/>
-          <p:nvPr/>
-        </p:nvSpPr>
-        <p:spPr>
-          <a:xfrm>
-            <a:off x="9684145" y="3769106"/>
-            <a:ext cx="411987" cy="169037"/>
-          </a:xfrm>
-          <a:prstGeom prst="rect">
-            <a:avLst/>
-          </a:prstGeom>
-          <a:noFill/>
-          <a:ln/>
-        </p:spPr>
-        <p:txBody>
-          <a:bodyPr wrap="square" lIns="0" tIns="0" rIns="0" bIns="0" rtlCol="0" anchor="ctr"/>
-          <a:lstStyle/>
-          <a:p>
-            <a:pPr marL="0" indent="0" algn="ctr">
-              <a:lnSpc>
-                <a:spcPct val="92000"/>
-              </a:lnSpc>
-              <a:buNone/>
-            </a:pPr>
-            <a:r>
-              <a:rPr lang="en-US" sz="1100" dirty="0">
-                <a:solidFill>
-                  <a:srgbClr val="2B3644"/>
-                </a:solidFill>
-                <a:latin typeface="Arial" pitchFamily="34" charset="0"/>
-                <a:ea typeface="Arial" pitchFamily="34" charset="-122"/>
-                <a:cs typeface="Arial" pitchFamily="34" charset="-120"/>
-              </a:rPr>
-              <a:t>Lab 2</a:t>
-            </a:r>
-            <a:endParaRPr lang="en-US" sz="1100" dirty="0"/>
-          </a:p>
-        </p:txBody>
-      </p:sp>
-      <p:sp>
-        <p:nvSpPr>
-          <p:cNvPr id="69" name="Text 49"/>
-          <p:cNvSpPr txBox="1"/>
-          <p:nvPr/>
-        </p:nvSpPr>
-        <p:spPr>
-          <a:xfrm>
-            <a:off x="11212845" y="3769106"/>
-            <a:ext cx="427494" cy="169037"/>
-          </a:xfrm>
-          <a:prstGeom prst="rect">
-            <a:avLst/>
-          </a:prstGeom>
-          <a:noFill/>
-          <a:ln/>
-        </p:spPr>
-        <p:txBody>
-          <a:bodyPr wrap="square" lIns="0" tIns="0" rIns="0" bIns="0" rtlCol="0" anchor="ctr"/>
-          <a:lstStyle/>
-          <a:p>
-            <a:pPr marL="0" indent="0" algn="ctr">
-              <a:lnSpc>
-                <a:spcPct val="92000"/>
-              </a:lnSpc>
-              <a:buNone/>
-            </a:pPr>
-            <a:r>
-              <a:rPr lang="en-US" sz="1100" dirty="0">
-                <a:solidFill>
-                  <a:srgbClr val="2B3644"/>
-                </a:solidFill>
-                <a:latin typeface="Arial" pitchFamily="34" charset="0"/>
-                <a:ea typeface="Arial" pitchFamily="34" charset="-122"/>
-                <a:cs typeface="Arial" pitchFamily="34" charset="-120"/>
-              </a:rPr>
-              <a:t>Lab K</a:t>
-            </a:r>
-            <a:endParaRPr lang="en-US" sz="1100" dirty="0"/>
-          </a:p>
-        </p:txBody>
-      </p:sp>
-      <p:sp>
-        <p:nvSpPr>
-          <p:cNvPr id="73" name="Text 53"/>
-          <p:cNvSpPr txBox="1"/>
-          <p:nvPr/>
-        </p:nvSpPr>
-        <p:spPr>
-          <a:xfrm>
-            <a:off x="9288060" y="6115896"/>
-            <a:ext cx="1377308" cy="207455"/>
-          </a:xfrm>
-          <a:prstGeom prst="rect">
-            <a:avLst/>
-          </a:prstGeom>
-          <a:noFill/>
-          <a:ln/>
-        </p:spPr>
-        <p:txBody>
-          <a:bodyPr wrap="square" lIns="0" tIns="0" rIns="0" bIns="0" rtlCol="0" anchor="ctr"/>
-          <a:lstStyle/>
-          <a:p>
-            <a:pPr marL="0" indent="0" algn="ctr">
-              <a:lnSpc>
-                <a:spcPct val="92000"/>
-              </a:lnSpc>
-              <a:buNone/>
-            </a:pPr>
-            <a:r>
-              <a:rPr lang="en-US" altLang="zh-CN" sz="1350" b="1">
-                <a:solidFill>
-                  <a:srgbClr val="1F2A37"/>
-                </a:solidFill>
-                <a:latin typeface="Arial" pitchFamily="34" charset="0"/>
-                <a:ea typeface="Arial" pitchFamily="34" charset="-122"/>
-                <a:cs typeface="Arial" pitchFamily="34" charset="-120"/>
-              </a:rPr>
-              <a:t>Model</a:t>
-            </a:r>
-            <a:endParaRPr lang="en-US" altLang="zh-CN" sz="1350" dirty="0"/>
-          </a:p>
-        </p:txBody>
-      </p:sp>
-      <p:sp>
-        <p:nvSpPr>
-          <p:cNvPr id="74" name="Text 54"/>
-          <p:cNvSpPr txBox="1"/>
-          <p:nvPr/>
-        </p:nvSpPr>
-        <p:spPr>
-          <a:xfrm>
-            <a:off x="8701958" y="6297023"/>
-            <a:ext cx="2549511" cy="207455"/>
-          </a:xfrm>
-          <a:prstGeom prst="rect">
-            <a:avLst/>
-          </a:prstGeom>
-          <a:noFill/>
-          <a:ln/>
-        </p:spPr>
-        <p:txBody>
-          <a:bodyPr wrap="square" lIns="0" tIns="0" rIns="0" bIns="0" rtlCol="0" anchor="ctr"/>
-          <a:lstStyle/>
-          <a:p>
-            <a:pPr marL="0" indent="0" algn="ctr">
-              <a:lnSpc>
-                <a:spcPct val="92000"/>
-              </a:lnSpc>
-              <a:buNone/>
-            </a:pPr>
-            <a:r>
-              <a:rPr lang="en-US" sz="1350" dirty="0">
-                <a:solidFill>
-                  <a:srgbClr val="6E7B87"/>
-                </a:solidFill>
-                <a:latin typeface="Arial" pitchFamily="34" charset="0"/>
-                <a:ea typeface="Arial" pitchFamily="34" charset="-122"/>
-                <a:cs typeface="Arial" pitchFamily="34" charset="-120"/>
-              </a:rPr>
-              <a:t>(design revised between rounds)</a:t>
-            </a:r>
-            <a:endParaRPr lang="en-US" sz="1350" dirty="0"/>
-          </a:p>
-        </p:txBody>
-      </p:sp>
-      <p:sp>
-        <p:nvSpPr>
-          <p:cNvPr id="82" name="Shape 10">
+          <p:cNvPr id="113" name="Shape 10">
             <a:extLst>
               <a:ext uri="{FF2B5EF4-FFF2-40B4-BE49-F238E27FC236}">
-                <a16:creationId xmlns:a16="http://schemas.microsoft.com/office/drawing/2014/main" id="{49011C04-2809-474A-9B8C-B035C6B3D8EE}"/>
+                <a16:creationId xmlns:a16="http://schemas.microsoft.com/office/drawing/2014/main" id="{081B343C-755F-4482-97EA-839582590B18}"/>
               </a:ext>
             </a:extLst>
           </p:cNvPr>
@@ -2305,9 +2869,9 @@
           <p:nvPr/>
         </p:nvSpPr>
         <p:spPr>
-          <a:xfrm flipV="1">
-            <a:off x="1978115" y="2280980"/>
-            <a:ext cx="0" cy="474677"/>
+          <a:xfrm flipH="1" flipV="1">
+            <a:off x="8796129" y="3045510"/>
+            <a:ext cx="924186" cy="624203"/>
           </a:xfrm>
           <a:prstGeom prst="line">
             <a:avLst/>
@@ -2325,10 +2889,10 @@
       </p:sp>
       <p:sp>
         <p:nvSpPr>
-          <p:cNvPr id="83" name="Shape 11">
+          <p:cNvPr id="115" name="Shape 10">
             <a:extLst>
               <a:ext uri="{FF2B5EF4-FFF2-40B4-BE49-F238E27FC236}">
-                <a16:creationId xmlns:a16="http://schemas.microsoft.com/office/drawing/2014/main" id="{01395F7F-2514-4FE3-95ED-262C66447B02}"/>
+                <a16:creationId xmlns:a16="http://schemas.microsoft.com/office/drawing/2014/main" id="{2BCFC6A6-8300-4312-AC6E-973057D3B269}"/>
               </a:ext>
             </a:extLst>
           </p:cNvPr>
@@ -2336,71 +2900,9 @@
           <p:nvPr/>
         </p:nvSpPr>
         <p:spPr>
-          <a:xfrm>
-            <a:off x="2777570" y="1687634"/>
-            <a:ext cx="874404" cy="0"/>
-          </a:xfrm>
-          <a:prstGeom prst="line">
-            <a:avLst/>
-          </a:prstGeom>
-          <a:noFill/>
-          <a:ln w="30480">
-            <a:solidFill>
-              <a:srgbClr val="3F8F5C"/>
-            </a:solidFill>
-            <a:prstDash val="solid"/>
-            <a:headEnd type="none"/>
-            <a:tailEnd type="none"/>
-          </a:ln>
-        </p:spPr>
-      </p:sp>
-      <p:sp>
-        <p:nvSpPr>
-          <p:cNvPr id="84" name="Shape 12">
-            <a:extLst>
-              <a:ext uri="{FF2B5EF4-FFF2-40B4-BE49-F238E27FC236}">
-                <a16:creationId xmlns:a16="http://schemas.microsoft.com/office/drawing/2014/main" id="{732AB474-3DCF-4017-A20A-02F17C437F54}"/>
-              </a:ext>
-            </a:extLst>
-          </p:cNvPr>
-          <p:cNvSpPr/>
-          <p:nvPr/>
-        </p:nvSpPr>
-        <p:spPr>
-          <a:xfrm>
-            <a:off x="3641815" y="1687634"/>
-            <a:ext cx="0" cy="3922328"/>
-          </a:xfrm>
-          <a:prstGeom prst="line">
-            <a:avLst/>
-          </a:prstGeom>
-          <a:noFill/>
-          <a:ln w="30480">
-            <a:solidFill>
-              <a:srgbClr val="3F8F5C"/>
-            </a:solidFill>
-            <a:prstDash val="solid"/>
-            <a:headEnd type="none"/>
-            <a:tailEnd type="none"/>
-          </a:ln>
-        </p:spPr>
-      </p:sp>
-      <p:sp>
-        <p:nvSpPr>
-          <p:cNvPr id="85" name="Shape 13">
-            <a:extLst>
-              <a:ext uri="{FF2B5EF4-FFF2-40B4-BE49-F238E27FC236}">
-                <a16:creationId xmlns:a16="http://schemas.microsoft.com/office/drawing/2014/main" id="{A7FECB0A-A5F4-4844-BDE2-F8B3B052194F}"/>
-              </a:ext>
-            </a:extLst>
-          </p:cNvPr>
-          <p:cNvSpPr/>
-          <p:nvPr/>
-        </p:nvSpPr>
-        <p:spPr>
-          <a:xfrm flipH="1">
-            <a:off x="2384088" y="5609962"/>
-            <a:ext cx="1267886" cy="0"/>
+          <a:xfrm flipV="1">
+            <a:off x="9958795" y="3027542"/>
+            <a:ext cx="0" cy="665988"/>
           </a:xfrm>
           <a:prstGeom prst="line">
             <a:avLst/>
@@ -2416,292 +2918,12 @@
           </a:ln>
         </p:spPr>
       </p:sp>
-      <p:pic>
-        <p:nvPicPr>
-          <p:cNvPr id="89" name="Image 10" descr="/liziqing/yukai/AI4AI4Cell/paradigm_figure_icons/loop_c.png">
+      <p:sp>
+        <p:nvSpPr>
+          <p:cNvPr id="116" name="Shape 10">
             <a:extLst>
               <a:ext uri="{FF2B5EF4-FFF2-40B4-BE49-F238E27FC236}">
-                <a16:creationId xmlns:a16="http://schemas.microsoft.com/office/drawing/2014/main" id="{D8A2A58A-70DA-4BD6-9878-5AF417DA36BD}"/>
-              </a:ext>
-            </a:extLst>
-          </p:cNvPr>
-          <p:cNvPicPr>
-            <a:picLocks noChangeAspect="1"/>
-          </p:cNvPicPr>
-          <p:nvPr/>
-        </p:nvPicPr>
-        <p:blipFill>
-          <a:blip r:embed="rId11"/>
-          <a:stretch>
-            <a:fillRect/>
-          </a:stretch>
-        </p:blipFill>
-        <p:spPr>
-          <a:xfrm>
-            <a:off x="1222380" y="1013093"/>
-            <a:ext cx="1548945" cy="1224166"/>
-          </a:xfrm>
-          <a:prstGeom prst="rect">
-            <a:avLst/>
-          </a:prstGeom>
-        </p:spPr>
-      </p:pic>
-      <p:pic>
-        <p:nvPicPr>
-          <p:cNvPr id="96" name="Image 17" descr="/liziqing/yukai/AI4AI4Cell/paradigm_figure_icons/net_c.png">
-            <a:extLst>
-              <a:ext uri="{FF2B5EF4-FFF2-40B4-BE49-F238E27FC236}">
-                <a16:creationId xmlns:a16="http://schemas.microsoft.com/office/drawing/2014/main" id="{9F28F0CF-6AC8-4164-BBAD-AFF35D0A2B84}"/>
-              </a:ext>
-            </a:extLst>
-          </p:cNvPr>
-          <p:cNvPicPr>
-            <a:picLocks noChangeAspect="1"/>
-          </p:cNvPicPr>
-          <p:nvPr/>
-        </p:nvPicPr>
-        <p:blipFill>
-          <a:blip r:embed="rId18"/>
-          <a:stretch>
-            <a:fillRect/>
-          </a:stretch>
-        </p:blipFill>
-        <p:spPr>
-          <a:xfrm>
-            <a:off x="1034143" y="5084180"/>
-            <a:ext cx="1124234" cy="986828"/>
-          </a:xfrm>
-          <a:prstGeom prst="rect">
-            <a:avLst/>
-          </a:prstGeom>
-        </p:spPr>
-      </p:pic>
-      <p:sp>
-        <p:nvSpPr>
-          <p:cNvPr id="97" name="Text 43">
-            <a:extLst>
-              <a:ext uri="{FF2B5EF4-FFF2-40B4-BE49-F238E27FC236}">
-                <a16:creationId xmlns:a16="http://schemas.microsoft.com/office/drawing/2014/main" id="{DA964F40-5814-4C93-8838-6A42BBCD8B8E}"/>
-              </a:ext>
-            </a:extLst>
-          </p:cNvPr>
-          <p:cNvSpPr txBox="1"/>
-          <p:nvPr/>
-        </p:nvSpPr>
-        <p:spPr>
-          <a:xfrm>
-            <a:off x="1077061" y="770522"/>
-            <a:ext cx="1945760" cy="222822"/>
-          </a:xfrm>
-          <a:prstGeom prst="rect">
-            <a:avLst/>
-          </a:prstGeom>
-          <a:noFill/>
-          <a:ln/>
-        </p:spPr>
-        <p:txBody>
-          <a:bodyPr wrap="square" lIns="0" tIns="0" rIns="0" bIns="0" rtlCol="0" anchor="ctr"/>
-          <a:lstStyle/>
-          <a:p>
-            <a:pPr marL="0" indent="0" algn="ctr">
-              <a:lnSpc>
-                <a:spcPct val="92000"/>
-              </a:lnSpc>
-              <a:buNone/>
-            </a:pPr>
-            <a:r>
-              <a:rPr lang="en-US" sz="1450" dirty="0">
-                <a:solidFill>
-                  <a:srgbClr val="2B3644"/>
-                </a:solidFill>
-                <a:latin typeface="Arial" pitchFamily="34" charset="0"/>
-                <a:ea typeface="Arial" pitchFamily="34" charset="-122"/>
-                <a:cs typeface="Arial" pitchFamily="34" charset="-120"/>
-              </a:rPr>
-              <a:t>Research / design loop</a:t>
-            </a:r>
-            <a:endParaRPr lang="en-US" sz="1450" dirty="0"/>
-          </a:p>
-        </p:txBody>
-      </p:sp>
-      <p:sp>
-        <p:nvSpPr>
-          <p:cNvPr id="98" name="Text 45">
-            <a:extLst>
-              <a:ext uri="{FF2B5EF4-FFF2-40B4-BE49-F238E27FC236}">
-                <a16:creationId xmlns:a16="http://schemas.microsoft.com/office/drawing/2014/main" id="{C69DC5DB-7CBC-4C75-A664-5ED9842FBE80}"/>
-              </a:ext>
-            </a:extLst>
-          </p:cNvPr>
-          <p:cNvSpPr txBox="1"/>
-          <p:nvPr/>
-        </p:nvSpPr>
-        <p:spPr>
-          <a:xfrm>
-            <a:off x="248044" y="2330544"/>
-            <a:ext cx="1873724" cy="338074"/>
-          </a:xfrm>
-          <a:prstGeom prst="rect">
-            <a:avLst/>
-          </a:prstGeom>
-          <a:noFill/>
-          <a:ln/>
-        </p:spPr>
-        <p:txBody>
-          <a:bodyPr wrap="square" lIns="0" tIns="0" rIns="0" bIns="0" rtlCol="0" anchor="ctr"/>
-          <a:lstStyle/>
-          <a:p>
-            <a:pPr marL="0" indent="0" algn="ctr">
-              <a:lnSpc>
-                <a:spcPct val="92000"/>
-              </a:lnSpc>
-              <a:buNone/>
-            </a:pPr>
-            <a:r>
-              <a:rPr lang="en-US" sz="1100" dirty="0">
-                <a:solidFill>
-                  <a:srgbClr val="3F8F5C"/>
-                </a:solidFill>
-                <a:latin typeface="Arial" pitchFamily="34" charset="0"/>
-                <a:ea typeface="Arial" pitchFamily="34" charset="-122"/>
-                <a:cs typeface="Arial" pitchFamily="34" charset="-120"/>
-              </a:rPr>
-              <a:t>Aggregate</a:t>
-            </a:r>
-            <a:endParaRPr lang="en-US" sz="1100" dirty="0">
-              <a:solidFill>
-                <a:srgbClr val="3F8F5C"/>
-              </a:solidFill>
-            </a:endParaRPr>
-          </a:p>
-          <a:p>
-            <a:pPr marL="0" indent="0" algn="ctr">
-              <a:lnSpc>
-                <a:spcPct val="92000"/>
-              </a:lnSpc>
-              <a:buNone/>
-            </a:pPr>
-            <a:r>
-              <a:rPr lang="en-US" sz="1100" dirty="0">
-                <a:solidFill>
-                  <a:srgbClr val="3F8F5C"/>
-                </a:solidFill>
-                <a:latin typeface="Arial" pitchFamily="34" charset="0"/>
-                <a:ea typeface="Arial" pitchFamily="34" charset="-122"/>
-                <a:cs typeface="Arial" pitchFamily="34" charset="-120"/>
-              </a:rPr>
-              <a:t>development evidence</a:t>
-            </a:r>
-            <a:endParaRPr lang="en-US" sz="1100" dirty="0">
-              <a:solidFill>
-                <a:srgbClr val="3F8F5C"/>
-              </a:solidFill>
-            </a:endParaRPr>
-          </a:p>
-        </p:txBody>
-      </p:sp>
-      <p:sp>
-        <p:nvSpPr>
-          <p:cNvPr id="102" name="Text 53">
-            <a:extLst>
-              <a:ext uri="{FF2B5EF4-FFF2-40B4-BE49-F238E27FC236}">
-                <a16:creationId xmlns:a16="http://schemas.microsoft.com/office/drawing/2014/main" id="{A5AF9A12-7215-4A9F-B4EA-7F5A22B7332E}"/>
-              </a:ext>
-            </a:extLst>
-          </p:cNvPr>
-          <p:cNvSpPr txBox="1"/>
-          <p:nvPr/>
-        </p:nvSpPr>
-        <p:spPr>
-          <a:xfrm>
-            <a:off x="910729" y="6104687"/>
-            <a:ext cx="1377308" cy="207455"/>
-          </a:xfrm>
-          <a:prstGeom prst="rect">
-            <a:avLst/>
-          </a:prstGeom>
-          <a:noFill/>
-          <a:ln/>
-        </p:spPr>
-        <p:txBody>
-          <a:bodyPr wrap="square" lIns="0" tIns="0" rIns="0" bIns="0" rtlCol="0" anchor="ctr"/>
-          <a:lstStyle/>
-          <a:p>
-            <a:pPr marL="0" indent="0" algn="ctr">
-              <a:lnSpc>
-                <a:spcPct val="92000"/>
-              </a:lnSpc>
-              <a:buNone/>
-            </a:pPr>
-            <a:r>
-              <a:rPr lang="en-US" altLang="zh-CN" sz="1350" b="1">
-                <a:solidFill>
-                  <a:srgbClr val="1F2A37"/>
-                </a:solidFill>
-                <a:latin typeface="Arial" pitchFamily="34" charset="0"/>
-                <a:ea typeface="Arial" pitchFamily="34" charset="-122"/>
-                <a:cs typeface="Arial" pitchFamily="34" charset="-120"/>
-              </a:rPr>
-              <a:t>Model</a:t>
-            </a:r>
-            <a:endParaRPr lang="en-US" sz="1350" dirty="0"/>
-          </a:p>
-        </p:txBody>
-      </p:sp>
-      <p:sp>
-        <p:nvSpPr>
-          <p:cNvPr id="103" name="Text 54">
-            <a:extLst>
-              <a:ext uri="{FF2B5EF4-FFF2-40B4-BE49-F238E27FC236}">
-                <a16:creationId xmlns:a16="http://schemas.microsoft.com/office/drawing/2014/main" id="{D6A70366-2B45-47C8-9347-281E35581F77}"/>
-              </a:ext>
-            </a:extLst>
-          </p:cNvPr>
-          <p:cNvSpPr txBox="1"/>
-          <p:nvPr/>
-        </p:nvSpPr>
-        <p:spPr>
-          <a:xfrm>
-            <a:off x="324627" y="6285814"/>
-            <a:ext cx="2549511" cy="207455"/>
-          </a:xfrm>
-          <a:prstGeom prst="rect">
-            <a:avLst/>
-          </a:prstGeom>
-          <a:noFill/>
-          <a:ln/>
-        </p:spPr>
-        <p:txBody>
-          <a:bodyPr wrap="square" lIns="0" tIns="0" rIns="0" bIns="0" rtlCol="0" anchor="ctr"/>
-          <a:lstStyle/>
-          <a:p>
-            <a:pPr marL="0" indent="0" algn="ctr">
-              <a:lnSpc>
-                <a:spcPct val="92000"/>
-              </a:lnSpc>
-              <a:buNone/>
-            </a:pPr>
-            <a:r>
-              <a:rPr lang="en-US" sz="1350" dirty="0">
-                <a:solidFill>
-                  <a:srgbClr val="6E7B87"/>
-                </a:solidFill>
-                <a:latin typeface="Arial" pitchFamily="34" charset="0"/>
-                <a:ea typeface="Arial" pitchFamily="34" charset="-122"/>
-                <a:cs typeface="Arial" pitchFamily="34" charset="-120"/>
-              </a:rPr>
-              <a:t>(design revised between rounds)</a:t>
-            </a:r>
-            <a:endParaRPr lang="en-US" sz="1350" dirty="0"/>
-          </a:p>
-        </p:txBody>
-      </p:sp>
-      <p:sp>
-        <p:nvSpPr>
-          <p:cNvPr id="104" name="Shape 13">
-            <a:extLst>
-              <a:ext uri="{FF2B5EF4-FFF2-40B4-BE49-F238E27FC236}">
-                <a16:creationId xmlns:a16="http://schemas.microsoft.com/office/drawing/2014/main" id="{720BE142-ED5B-4CA3-BFC3-A6CFED1EBC2D}"/>
+                <a16:creationId xmlns:a16="http://schemas.microsoft.com/office/drawing/2014/main" id="{8144C77F-E9A1-40E0-9BB9-86B45F9E46A0}"/>
               </a:ext>
             </a:extLst>
           </p:cNvPr>
@@ -2709,40 +2931,9 @@
           <p:nvPr/>
         </p:nvSpPr>
         <p:spPr>
-          <a:xfrm flipH="1">
-            <a:off x="1547012" y="4384513"/>
-            <a:ext cx="0" cy="575011"/>
-          </a:xfrm>
-          <a:prstGeom prst="line">
-            <a:avLst/>
-          </a:prstGeom>
-          <a:noFill/>
-          <a:ln w="30480">
-            <a:solidFill>
-              <a:schemeClr val="accent1"/>
-            </a:solidFill>
-            <a:prstDash val="solid"/>
-            <a:headEnd type="none"/>
-            <a:tailEnd type="triangle"/>
-          </a:ln>
-        </p:spPr>
-      </p:sp>
-      <p:sp>
-        <p:nvSpPr>
-          <p:cNvPr id="105" name="Shape 10">
-            <a:extLst>
-              <a:ext uri="{FF2B5EF4-FFF2-40B4-BE49-F238E27FC236}">
-                <a16:creationId xmlns:a16="http://schemas.microsoft.com/office/drawing/2014/main" id="{15944F5E-0465-44E0-A622-314EE18BEA7A}"/>
-              </a:ext>
-            </a:extLst>
-          </p:cNvPr>
-          <p:cNvSpPr/>
-          <p:nvPr/>
-        </p:nvSpPr>
-        <p:spPr>
           <a:xfrm flipV="1">
-            <a:off x="1835875" y="4384512"/>
-            <a:ext cx="0" cy="575011"/>
+            <a:off x="10439829" y="3045510"/>
+            <a:ext cx="1059446" cy="616072"/>
           </a:xfrm>
           <a:prstGeom prst="line">
             <a:avLst/>
@@ -2760,10 +2951,10 @@
       </p:sp>
       <p:sp>
         <p:nvSpPr>
-          <p:cNvPr id="106" name="Text 45">
+          <p:cNvPr id="117" name="Text 45">
             <a:extLst>
               <a:ext uri="{FF2B5EF4-FFF2-40B4-BE49-F238E27FC236}">
-                <a16:creationId xmlns:a16="http://schemas.microsoft.com/office/drawing/2014/main" id="{FA1CEE2C-59D1-4909-8760-7087F81DACA7}"/>
+                <a16:creationId xmlns:a16="http://schemas.microsoft.com/office/drawing/2014/main" id="{C1A54B65-CD21-4B5F-834C-6290F7C5E3B7}"/>
               </a:ext>
             </a:extLst>
           </p:cNvPr>
@@ -2772,8 +2963,8 @@
         </p:nvSpPr>
         <p:spPr>
           <a:xfrm>
-            <a:off x="1845503" y="4583406"/>
-            <a:ext cx="1361067" cy="207455"/>
+            <a:off x="10921271" y="3267435"/>
+            <a:ext cx="933390" cy="338074"/>
           </a:xfrm>
           <a:prstGeom prst="rect">
             <a:avLst/>
@@ -2807,10 +2998,41 @@
       </p:sp>
       <p:sp>
         <p:nvSpPr>
-          <p:cNvPr id="107" name="Text 45">
+          <p:cNvPr id="118" name="Shape 10">
             <a:extLst>
               <a:ext uri="{FF2B5EF4-FFF2-40B4-BE49-F238E27FC236}">
-                <a16:creationId xmlns:a16="http://schemas.microsoft.com/office/drawing/2014/main" id="{168FDA53-4230-4EDE-9FED-DBEC6B184C0A}"/>
+                <a16:creationId xmlns:a16="http://schemas.microsoft.com/office/drawing/2014/main" id="{1133D533-02F6-4C11-BFBB-61B8223A67AB}"/>
+              </a:ext>
+            </a:extLst>
+          </p:cNvPr>
+          <p:cNvSpPr/>
+          <p:nvPr/>
+        </p:nvSpPr>
+        <p:spPr>
+          <a:xfrm flipV="1">
+            <a:off x="8778527" y="1776572"/>
+            <a:ext cx="1380718" cy="528929"/>
+          </a:xfrm>
+          <a:prstGeom prst="line">
+            <a:avLst/>
+          </a:prstGeom>
+          <a:noFill/>
+          <a:ln w="30480">
+            <a:solidFill>
+              <a:srgbClr val="3F8F5C"/>
+            </a:solidFill>
+            <a:prstDash val="solid"/>
+            <a:headEnd type="none"/>
+            <a:tailEnd type="triangle"/>
+          </a:ln>
+        </p:spPr>
+      </p:sp>
+      <p:sp>
+        <p:nvSpPr>
+          <p:cNvPr id="119" name="Text 45">
+            <a:extLst>
+              <a:ext uri="{FF2B5EF4-FFF2-40B4-BE49-F238E27FC236}">
+                <a16:creationId xmlns:a16="http://schemas.microsoft.com/office/drawing/2014/main" id="{37762929-F218-4B84-8813-7A3F3A8A0810}"/>
               </a:ext>
             </a:extLst>
           </p:cNvPr>
@@ -2819,8 +3041,8 @@
         </p:nvSpPr>
         <p:spPr>
           <a:xfrm>
-            <a:off x="362629" y="4578326"/>
-            <a:ext cx="1198154" cy="207455"/>
+            <a:off x="8176126" y="1757883"/>
+            <a:ext cx="1675195" cy="338074"/>
           </a:xfrm>
           <a:prstGeom prst="rect">
             <a:avLst/>
@@ -2839,25 +3061,133 @@
               <a:buNone/>
             </a:pPr>
             <a:r>
-              <a:rPr lang="en-US" sz="1100">
+              <a:rPr lang="en-US" sz="1200">
                 <a:solidFill>
-                  <a:srgbClr val="4472C4"/>
+                  <a:srgbClr val="3F8F5C"/>
                 </a:solidFill>
                 <a:latin typeface="Arial" pitchFamily="34" charset="0"/>
                 <a:ea typeface="Arial" pitchFamily="34" charset="-122"/>
                 <a:cs typeface="Arial" pitchFamily="34" charset="-120"/>
               </a:rPr>
-              <a:t>Accessible data</a:t>
+              <a:t>Aggregate development </a:t>
             </a:r>
+            <a:r>
+              <a:rPr lang="en-US" sz="1200" dirty="0">
+                <a:solidFill>
+                  <a:srgbClr val="3F8F5C"/>
+                </a:solidFill>
+                <a:latin typeface="Arial" pitchFamily="34" charset="0"/>
+                <a:ea typeface="Arial" pitchFamily="34" charset="-122"/>
+                <a:cs typeface="Arial" pitchFamily="34" charset="-120"/>
+              </a:rPr>
+              <a:t>evidence</a:t>
+            </a:r>
+            <a:endParaRPr lang="en-US" sz="1200" dirty="0">
+              <a:solidFill>
+                <a:srgbClr val="3F8F5C"/>
+              </a:solidFill>
+            </a:endParaRPr>
           </a:p>
         </p:txBody>
       </p:sp>
       <p:sp>
         <p:nvSpPr>
-          <p:cNvPr id="108" name="Text 44">
+          <p:cNvPr id="120" name="Shape 10">
             <a:extLst>
               <a:ext uri="{FF2B5EF4-FFF2-40B4-BE49-F238E27FC236}">
-                <a16:creationId xmlns:a16="http://schemas.microsoft.com/office/drawing/2014/main" id="{0E62FE48-8E2A-4075-9700-ADA267EDC277}"/>
+                <a16:creationId xmlns:a16="http://schemas.microsoft.com/office/drawing/2014/main" id="{DFFDEE9D-00D2-489D-833D-93A5CE6D7582}"/>
+              </a:ext>
+            </a:extLst>
+          </p:cNvPr>
+          <p:cNvSpPr/>
+          <p:nvPr/>
+        </p:nvSpPr>
+        <p:spPr>
+          <a:xfrm flipV="1">
+            <a:off x="9936123" y="1754688"/>
+            <a:ext cx="421688" cy="550812"/>
+          </a:xfrm>
+          <a:prstGeom prst="line">
+            <a:avLst/>
+          </a:prstGeom>
+          <a:noFill/>
+          <a:ln w="30480">
+            <a:solidFill>
+              <a:srgbClr val="3F8F5C"/>
+            </a:solidFill>
+            <a:prstDash val="solid"/>
+            <a:headEnd type="none"/>
+            <a:tailEnd type="triangle"/>
+          </a:ln>
+        </p:spPr>
+      </p:sp>
+      <p:sp>
+        <p:nvSpPr>
+          <p:cNvPr id="121" name="Shape 10">
+            <a:extLst>
+              <a:ext uri="{FF2B5EF4-FFF2-40B4-BE49-F238E27FC236}">
+                <a16:creationId xmlns:a16="http://schemas.microsoft.com/office/drawing/2014/main" id="{01A1E998-721E-4B19-AD3E-06B68D5F4ED9}"/>
+              </a:ext>
+            </a:extLst>
+          </p:cNvPr>
+          <p:cNvSpPr/>
+          <p:nvPr/>
+        </p:nvSpPr>
+        <p:spPr>
+          <a:xfrm flipH="1" flipV="1">
+            <a:off x="10557702" y="1761040"/>
+            <a:ext cx="839861" cy="544459"/>
+          </a:xfrm>
+          <a:prstGeom prst="line">
+            <a:avLst/>
+          </a:prstGeom>
+          <a:noFill/>
+          <a:ln w="30480">
+            <a:solidFill>
+              <a:srgbClr val="3F8F5C"/>
+            </a:solidFill>
+            <a:prstDash val="solid"/>
+            <a:headEnd type="none"/>
+            <a:tailEnd type="triangle"/>
+          </a:ln>
+        </p:spPr>
+      </p:sp>
+      <p:pic>
+        <p:nvPicPr>
+          <p:cNvPr id="79" name="Image 17" descr="/liziqing/yukai/AI4AI4Cell/paradigm_figure_icons/net_c.png">
+            <a:extLst>
+              <a:ext uri="{FF2B5EF4-FFF2-40B4-BE49-F238E27FC236}">
+                <a16:creationId xmlns:a16="http://schemas.microsoft.com/office/drawing/2014/main" id="{118125D7-FB72-4D5D-90B8-944CEA9E94F0}"/>
+              </a:ext>
+            </a:extLst>
+          </p:cNvPr>
+          <p:cNvPicPr>
+            <a:picLocks noChangeAspect="1"/>
+          </p:cNvPicPr>
+          <p:nvPr/>
+        </p:nvPicPr>
+        <p:blipFill>
+          <a:blip r:embed="rId16"/>
+          <a:stretch>
+            <a:fillRect/>
+          </a:stretch>
+        </p:blipFill>
+        <p:spPr>
+          <a:xfrm>
+            <a:off x="5433416" y="3132217"/>
+            <a:ext cx="1028819" cy="903075"/>
+          </a:xfrm>
+          <a:prstGeom prst="rect">
+            <a:avLst/>
+          </a:prstGeom>
+        </p:spPr>
+      </p:pic>
+      <p:sp>
+        <p:nvSpPr>
+          <p:cNvPr id="80" name="Text 53">
+            <a:extLst>
+              <a:ext uri="{FF2B5EF4-FFF2-40B4-BE49-F238E27FC236}">
+                <a16:creationId xmlns:a16="http://schemas.microsoft.com/office/drawing/2014/main" id="{BF8FB8AB-194C-496C-9B61-2650C531F201}"/>
               </a:ext>
             </a:extLst>
           </p:cNvPr>
@@ -2866,8 +3196,8 @@
         </p:nvSpPr>
         <p:spPr>
           <a:xfrm>
-            <a:off x="2879027" y="1307881"/>
-            <a:ext cx="780719" cy="338074"/>
+            <a:off x="5302318" y="4074501"/>
+            <a:ext cx="1377308" cy="207455"/>
           </a:xfrm>
           <a:prstGeom prst="rect">
             <a:avLst/>
@@ -2886,147 +3216,61 @@
               <a:buNone/>
             </a:pPr>
             <a:r>
-              <a:rPr lang="en-US" sz="1100" dirty="0">
+              <a:rPr lang="en-US" altLang="zh-CN" sz="1600">
                 <a:solidFill>
-                  <a:srgbClr val="3F8F5C"/>
+                  <a:srgbClr val="2B3644"/>
                 </a:solidFill>
                 <a:latin typeface="Arial" pitchFamily="34" charset="0"/>
-                <a:ea typeface="Arial" pitchFamily="34" charset="-122"/>
                 <a:cs typeface="Arial" pitchFamily="34" charset="-120"/>
               </a:rPr>
-              <a:t>Design</a:t>
+              <a:t>Model</a:t>
             </a:r>
-            <a:endParaRPr lang="en-US" sz="1100" dirty="0">
+            <a:endParaRPr lang="en-US" sz="1600" dirty="0">
               <a:solidFill>
-                <a:srgbClr val="3F8F5C"/>
+                <a:srgbClr val="2B3644"/>
               </a:solidFill>
-            </a:endParaRPr>
-          </a:p>
-          <a:p>
-            <a:pPr marL="0" indent="0" algn="ctr">
-              <a:lnSpc>
-                <a:spcPct val="92000"/>
-              </a:lnSpc>
-              <a:buNone/>
-            </a:pPr>
-            <a:r>
-              <a:rPr lang="en-US" sz="1100" dirty="0">
-                <a:solidFill>
-                  <a:srgbClr val="3F8F5C"/>
-                </a:solidFill>
-                <a:latin typeface="Arial" pitchFamily="34" charset="0"/>
-                <a:ea typeface="Arial" pitchFamily="34" charset="-122"/>
-                <a:cs typeface="Arial" pitchFamily="34" charset="-120"/>
-              </a:rPr>
-              <a:t>revision</a:t>
-            </a:r>
-            <a:endParaRPr lang="en-US" sz="1100" dirty="0">
-              <a:solidFill>
-                <a:srgbClr val="3F8F5C"/>
-              </a:solidFill>
+              <a:latin typeface="Arial" pitchFamily="34" charset="0"/>
+              <a:cs typeface="Arial" pitchFamily="34" charset="-120"/>
             </a:endParaRPr>
           </a:p>
         </p:txBody>
       </p:sp>
-      <p:sp>
-        <p:nvSpPr>
-          <p:cNvPr id="109" name="Shape 4">
+      <p:pic>
+        <p:nvPicPr>
+          <p:cNvPr id="81" name="Image 10" descr="/liziqing/yukai/AI4AI4Cell/paradigm_figure_icons/loop_c.png">
             <a:extLst>
               <a:ext uri="{FF2B5EF4-FFF2-40B4-BE49-F238E27FC236}">
-                <a16:creationId xmlns:a16="http://schemas.microsoft.com/office/drawing/2014/main" id="{EE78043A-FE46-4123-894E-B11680A05446}"/>
+                <a16:creationId xmlns:a16="http://schemas.microsoft.com/office/drawing/2014/main" id="{CEADDE51-A343-4279-9744-3C20B780A6D9}"/>
               </a:ext>
             </a:extLst>
           </p:cNvPr>
-          <p:cNvSpPr/>
-          <p:nvPr/>
-        </p:nvSpPr>
-        <p:spPr>
-          <a:xfrm>
-            <a:off x="8636929" y="4437400"/>
-            <a:ext cx="966099" cy="656751"/>
-          </a:xfrm>
-          <a:prstGeom prst="line">
-            <a:avLst/>
-          </a:prstGeom>
-          <a:noFill/>
-          <a:ln w="30480">
-            <a:solidFill>
-              <a:schemeClr val="accent1"/>
-            </a:solidFill>
-            <a:prstDash val="solid"/>
-            <a:headEnd type="none"/>
-            <a:tailEnd type="triangle"/>
-          </a:ln>
-        </p:spPr>
-      </p:sp>
-      <p:sp>
-        <p:nvSpPr>
-          <p:cNvPr id="110" name="Shape 5">
+          <p:cNvPicPr>
+            <a:picLocks noChangeAspect="1"/>
+          </p:cNvPicPr>
+          <p:nvPr/>
+        </p:nvPicPr>
+        <p:blipFill>
+          <a:blip r:embed="rId17"/>
+          <a:stretch>
+            <a:fillRect/>
+          </a:stretch>
+        </p:blipFill>
+        <p:spPr>
+          <a:xfrm>
+            <a:off x="9536739" y="904235"/>
+            <a:ext cx="1089592" cy="861129"/>
+          </a:xfrm>
+          <a:prstGeom prst="rect">
+            <a:avLst/>
+          </a:prstGeom>
+        </p:spPr>
+      </p:pic>
+      <p:sp>
+        <p:nvSpPr>
+          <p:cNvPr id="86" name="Text 43">
             <a:extLst>
               <a:ext uri="{FF2B5EF4-FFF2-40B4-BE49-F238E27FC236}">
-                <a16:creationId xmlns:a16="http://schemas.microsoft.com/office/drawing/2014/main" id="{9EBB9B59-88AC-4AAB-9511-2361BAE49417}"/>
-              </a:ext>
-            </a:extLst>
-          </p:cNvPr>
-          <p:cNvSpPr/>
-          <p:nvPr/>
-        </p:nvSpPr>
-        <p:spPr>
-          <a:xfrm>
-            <a:off x="9835578" y="4437401"/>
-            <a:ext cx="0" cy="656751"/>
-          </a:xfrm>
-          <a:prstGeom prst="line">
-            <a:avLst/>
-          </a:prstGeom>
-          <a:noFill/>
-          <a:ln w="30480">
-            <a:solidFill>
-              <a:schemeClr val="accent1"/>
-            </a:solidFill>
-            <a:prstDash val="solid"/>
-            <a:headEnd type="none"/>
-            <a:tailEnd type="triangle"/>
-          </a:ln>
-        </p:spPr>
-      </p:sp>
-      <p:sp>
-        <p:nvSpPr>
-          <p:cNvPr id="111" name="Shape 6">
-            <a:extLst>
-              <a:ext uri="{FF2B5EF4-FFF2-40B4-BE49-F238E27FC236}">
-                <a16:creationId xmlns:a16="http://schemas.microsoft.com/office/drawing/2014/main" id="{96B550B7-22C6-4D16-892C-201CEFA4A649}"/>
-              </a:ext>
-            </a:extLst>
-          </p:cNvPr>
-          <p:cNvSpPr/>
-          <p:nvPr/>
-        </p:nvSpPr>
-        <p:spPr>
-          <a:xfrm flipH="1">
-            <a:off x="10268509" y="4436160"/>
-            <a:ext cx="1059446" cy="624203"/>
-          </a:xfrm>
-          <a:prstGeom prst="line">
-            <a:avLst/>
-          </a:prstGeom>
-          <a:noFill/>
-          <a:ln w="30480">
-            <a:solidFill>
-              <a:schemeClr val="accent1"/>
-            </a:solidFill>
-            <a:prstDash val="solid"/>
-            <a:headEnd type="none"/>
-            <a:tailEnd type="triangle"/>
-          </a:ln>
-        </p:spPr>
-      </p:sp>
-      <p:sp>
-        <p:nvSpPr>
-          <p:cNvPr id="112" name="Text 38">
-            <a:extLst>
-              <a:ext uri="{FF2B5EF4-FFF2-40B4-BE49-F238E27FC236}">
-                <a16:creationId xmlns:a16="http://schemas.microsoft.com/office/drawing/2014/main" id="{E4AA127B-9121-40AC-B8C9-CD5117657625}"/>
+                <a16:creationId xmlns:a16="http://schemas.microsoft.com/office/drawing/2014/main" id="{436E9937-820B-4222-981B-F8099C6CA724}"/>
               </a:ext>
             </a:extLst>
           </p:cNvPr>
@@ -3035,158 +3279,8 @@
         </p:nvSpPr>
         <p:spPr>
           <a:xfrm>
-            <a:off x="8148870" y="4646945"/>
-            <a:ext cx="1249149" cy="384175"/>
-          </a:xfrm>
-          <a:prstGeom prst="rect">
-            <a:avLst/>
-          </a:prstGeom>
-          <a:noFill/>
-          <a:ln/>
-        </p:spPr>
-        <p:txBody>
-          <a:bodyPr wrap="square" lIns="0" tIns="0" rIns="0" bIns="0" rtlCol="0" anchor="ctr"/>
-          <a:lstStyle>
-            <a:lvl1pPr indent="0" algn="ctr">
-              <a:lnSpc>
-                <a:spcPct val="92000"/>
-              </a:lnSpc>
-              <a:buNone/>
-              <a:defRPr sz="1100">
-                <a:solidFill>
-                  <a:srgbClr val="4472C4"/>
-                </a:solidFill>
-                <a:latin typeface="Arial" pitchFamily="34" charset="0"/>
-                <a:ea typeface="Arial" pitchFamily="34" charset="-122"/>
-                <a:cs typeface="Arial" pitchFamily="34" charset="-120"/>
-              </a:defRPr>
-            </a:lvl1pPr>
-          </a:lstStyle>
-          <a:p>
-            <a:r>
-              <a:rPr lang="en-US"/>
-              <a:t>Local</a:t>
-            </a:r>
-            <a:endParaRPr lang="en-US" dirty="0"/>
-          </a:p>
-          <a:p>
-            <a:r>
-              <a:rPr lang="en-US"/>
-              <a:t>update</a:t>
-            </a:r>
-            <a:endParaRPr lang="en-US" dirty="0"/>
-          </a:p>
-        </p:txBody>
-      </p:sp>
-      <p:sp>
-        <p:nvSpPr>
-          <p:cNvPr id="113" name="Shape 10">
-            <a:extLst>
-              <a:ext uri="{FF2B5EF4-FFF2-40B4-BE49-F238E27FC236}">
-                <a16:creationId xmlns:a16="http://schemas.microsoft.com/office/drawing/2014/main" id="{081B343C-755F-4482-97EA-839582590B18}"/>
-              </a:ext>
-            </a:extLst>
-          </p:cNvPr>
-          <p:cNvSpPr/>
-          <p:nvPr/>
-        </p:nvSpPr>
-        <p:spPr>
-          <a:xfrm flipH="1" flipV="1">
-            <a:off x="8796129" y="4436160"/>
-            <a:ext cx="924186" cy="624203"/>
-          </a:xfrm>
-          <a:prstGeom prst="line">
-            <a:avLst/>
-          </a:prstGeom>
-          <a:noFill/>
-          <a:ln w="30480">
-            <a:solidFill>
-              <a:srgbClr val="3F8F5C"/>
-            </a:solidFill>
-            <a:prstDash val="solid"/>
-            <a:headEnd type="none"/>
-            <a:tailEnd type="triangle"/>
-          </a:ln>
-        </p:spPr>
-      </p:sp>
-      <p:sp>
-        <p:nvSpPr>
-          <p:cNvPr id="115" name="Shape 10">
-            <a:extLst>
-              <a:ext uri="{FF2B5EF4-FFF2-40B4-BE49-F238E27FC236}">
-                <a16:creationId xmlns:a16="http://schemas.microsoft.com/office/drawing/2014/main" id="{2BCFC6A6-8300-4312-AC6E-973057D3B269}"/>
-              </a:ext>
-            </a:extLst>
-          </p:cNvPr>
-          <p:cNvSpPr/>
-          <p:nvPr/>
-        </p:nvSpPr>
-        <p:spPr>
-          <a:xfrm flipV="1">
-            <a:off x="9958795" y="4418192"/>
-            <a:ext cx="0" cy="665988"/>
-          </a:xfrm>
-          <a:prstGeom prst="line">
-            <a:avLst/>
-          </a:prstGeom>
-          <a:noFill/>
-          <a:ln w="30480">
-            <a:solidFill>
-              <a:srgbClr val="3F8F5C"/>
-            </a:solidFill>
-            <a:prstDash val="solid"/>
-            <a:headEnd type="none"/>
-            <a:tailEnd type="triangle"/>
-          </a:ln>
-        </p:spPr>
-      </p:sp>
-      <p:sp>
-        <p:nvSpPr>
-          <p:cNvPr id="116" name="Shape 10">
-            <a:extLst>
-              <a:ext uri="{FF2B5EF4-FFF2-40B4-BE49-F238E27FC236}">
-                <a16:creationId xmlns:a16="http://schemas.microsoft.com/office/drawing/2014/main" id="{8144C77F-E9A1-40E0-9BB9-86B45F9E46A0}"/>
-              </a:ext>
-            </a:extLst>
-          </p:cNvPr>
-          <p:cNvSpPr/>
-          <p:nvPr/>
-        </p:nvSpPr>
-        <p:spPr>
-          <a:xfrm flipV="1">
-            <a:off x="10439829" y="4436160"/>
-            <a:ext cx="1059446" cy="616072"/>
-          </a:xfrm>
-          <a:prstGeom prst="line">
-            <a:avLst/>
-          </a:prstGeom>
-          <a:noFill/>
-          <a:ln w="30480">
-            <a:solidFill>
-              <a:srgbClr val="3F8F5C"/>
-            </a:solidFill>
-            <a:prstDash val="solid"/>
-            <a:headEnd type="none"/>
-            <a:tailEnd type="triangle"/>
-          </a:ln>
-        </p:spPr>
-      </p:sp>
-      <p:sp>
-        <p:nvSpPr>
-          <p:cNvPr id="117" name="Text 45">
-            <a:extLst>
-              <a:ext uri="{FF2B5EF4-FFF2-40B4-BE49-F238E27FC236}">
-                <a16:creationId xmlns:a16="http://schemas.microsoft.com/office/drawing/2014/main" id="{C1A54B65-CD21-4B5F-834C-6290F7C5E3B7}"/>
-              </a:ext>
-            </a:extLst>
-          </p:cNvPr>
-          <p:cNvSpPr txBox="1"/>
-          <p:nvPr/>
-        </p:nvSpPr>
-        <p:spPr>
-          <a:xfrm>
-            <a:off x="10921271" y="4658085"/>
-            <a:ext cx="933390" cy="338074"/>
+            <a:off x="8902982" y="636859"/>
+            <a:ext cx="2167835" cy="234031"/>
           </a:xfrm>
           <a:prstGeom prst="rect">
             <a:avLst/>
@@ -3205,187 +3299,19 @@
               <a:buNone/>
             </a:pPr>
             <a:r>
-              <a:rPr lang="en-US" sz="1100">
+              <a:rPr lang="en-US" sz="1600" dirty="0">
                 <a:solidFill>
-                  <a:srgbClr val="3F8F5C"/>
+                  <a:srgbClr val="2B3644"/>
                 </a:solidFill>
                 <a:latin typeface="Arial" pitchFamily="34" charset="0"/>
                 <a:ea typeface="Arial" pitchFamily="34" charset="-122"/>
                 <a:cs typeface="Arial" pitchFamily="34" charset="-120"/>
               </a:rPr>
-              <a:t>model parameters </a:t>
+              <a:t>Research / design loop</a:t>
             </a:r>
+            <a:endParaRPr lang="en-US" sz="1600" dirty="0"/>
           </a:p>
         </p:txBody>
-      </p:sp>
-      <p:sp>
-        <p:nvSpPr>
-          <p:cNvPr id="118" name="Shape 10">
-            <a:extLst>
-              <a:ext uri="{FF2B5EF4-FFF2-40B4-BE49-F238E27FC236}">
-                <a16:creationId xmlns:a16="http://schemas.microsoft.com/office/drawing/2014/main" id="{1133D533-02F6-4C11-BFBB-61B8223A67AB}"/>
-              </a:ext>
-            </a:extLst>
-          </p:cNvPr>
-          <p:cNvSpPr/>
-          <p:nvPr/>
-        </p:nvSpPr>
-        <p:spPr>
-          <a:xfrm flipV="1">
-            <a:off x="8741646" y="2300114"/>
-            <a:ext cx="1326219" cy="850333"/>
-          </a:xfrm>
-          <a:prstGeom prst="line">
-            <a:avLst/>
-          </a:prstGeom>
-          <a:noFill/>
-          <a:ln w="30480">
-            <a:solidFill>
-              <a:srgbClr val="3F8F5C"/>
-            </a:solidFill>
-            <a:prstDash val="solid"/>
-            <a:headEnd type="none"/>
-            <a:tailEnd type="triangle"/>
-          </a:ln>
-        </p:spPr>
-      </p:sp>
-      <p:sp>
-        <p:nvSpPr>
-          <p:cNvPr id="119" name="Text 45">
-            <a:extLst>
-              <a:ext uri="{FF2B5EF4-FFF2-40B4-BE49-F238E27FC236}">
-                <a16:creationId xmlns:a16="http://schemas.microsoft.com/office/drawing/2014/main" id="{37762929-F218-4B84-8813-7A3F3A8A0810}"/>
-              </a:ext>
-            </a:extLst>
-          </p:cNvPr>
-          <p:cNvSpPr txBox="1"/>
-          <p:nvPr/>
-        </p:nvSpPr>
-        <p:spPr>
-          <a:xfrm>
-            <a:off x="8300862" y="2356545"/>
-            <a:ext cx="1379998" cy="338074"/>
-          </a:xfrm>
-          <a:prstGeom prst="rect">
-            <a:avLst/>
-          </a:prstGeom>
-          <a:noFill/>
-          <a:ln/>
-        </p:spPr>
-        <p:txBody>
-          <a:bodyPr wrap="square" lIns="0" tIns="0" rIns="0" bIns="0" rtlCol="0" anchor="ctr"/>
-          <a:lstStyle/>
-          <a:p>
-            <a:pPr marL="0" indent="0" algn="ctr">
-              <a:lnSpc>
-                <a:spcPct val="92000"/>
-              </a:lnSpc>
-              <a:buNone/>
-            </a:pPr>
-            <a:r>
-              <a:rPr lang="en-US" sz="1100" dirty="0">
-                <a:solidFill>
-                  <a:srgbClr val="3F8F5C"/>
-                </a:solidFill>
-                <a:latin typeface="Arial" pitchFamily="34" charset="0"/>
-                <a:ea typeface="Arial" pitchFamily="34" charset="-122"/>
-                <a:cs typeface="Arial" pitchFamily="34" charset="-120"/>
-              </a:rPr>
-              <a:t>Aggregate</a:t>
-            </a:r>
-            <a:endParaRPr lang="en-US" sz="1100" dirty="0">
-              <a:solidFill>
-                <a:srgbClr val="3F8F5C"/>
-              </a:solidFill>
-            </a:endParaRPr>
-          </a:p>
-          <a:p>
-            <a:pPr marL="0" indent="0" algn="ctr">
-              <a:lnSpc>
-                <a:spcPct val="92000"/>
-              </a:lnSpc>
-              <a:buNone/>
-            </a:pPr>
-            <a:r>
-              <a:rPr lang="en-US" sz="1100" dirty="0">
-                <a:solidFill>
-                  <a:srgbClr val="3F8F5C"/>
-                </a:solidFill>
-                <a:latin typeface="Arial" pitchFamily="34" charset="0"/>
-                <a:ea typeface="Arial" pitchFamily="34" charset="-122"/>
-                <a:cs typeface="Arial" pitchFamily="34" charset="-120"/>
-              </a:rPr>
-              <a:t>development evidence</a:t>
-            </a:r>
-            <a:endParaRPr lang="en-US" sz="1100" dirty="0">
-              <a:solidFill>
-                <a:srgbClr val="3F8F5C"/>
-              </a:solidFill>
-            </a:endParaRPr>
-          </a:p>
-        </p:txBody>
-      </p:sp>
-      <p:sp>
-        <p:nvSpPr>
-          <p:cNvPr id="120" name="Shape 10">
-            <a:extLst>
-              <a:ext uri="{FF2B5EF4-FFF2-40B4-BE49-F238E27FC236}">
-                <a16:creationId xmlns:a16="http://schemas.microsoft.com/office/drawing/2014/main" id="{DFFDEE9D-00D2-489D-833D-93A5CE6D7582}"/>
-              </a:ext>
-            </a:extLst>
-          </p:cNvPr>
-          <p:cNvSpPr/>
-          <p:nvPr/>
-        </p:nvSpPr>
-        <p:spPr>
-          <a:xfrm flipV="1">
-            <a:off x="9958794" y="2300790"/>
-            <a:ext cx="379967" cy="849657"/>
-          </a:xfrm>
-          <a:prstGeom prst="line">
-            <a:avLst/>
-          </a:prstGeom>
-          <a:noFill/>
-          <a:ln w="30480">
-            <a:solidFill>
-              <a:srgbClr val="3F8F5C"/>
-            </a:solidFill>
-            <a:prstDash val="solid"/>
-            <a:headEnd type="none"/>
-            <a:tailEnd type="triangle"/>
-          </a:ln>
-        </p:spPr>
-      </p:sp>
-      <p:sp>
-        <p:nvSpPr>
-          <p:cNvPr id="121" name="Shape 10">
-            <a:extLst>
-              <a:ext uri="{FF2B5EF4-FFF2-40B4-BE49-F238E27FC236}">
-                <a16:creationId xmlns:a16="http://schemas.microsoft.com/office/drawing/2014/main" id="{01A1E998-721E-4B19-AD3E-06B68D5F4ED9}"/>
-              </a:ext>
-            </a:extLst>
-          </p:cNvPr>
-          <p:cNvSpPr/>
-          <p:nvPr/>
-        </p:nvSpPr>
-        <p:spPr>
-          <a:xfrm flipH="1" flipV="1">
-            <a:off x="10564054" y="2300791"/>
-            <a:ext cx="839861" cy="842504"/>
-          </a:xfrm>
-          <a:prstGeom prst="line">
-            <a:avLst/>
-          </a:prstGeom>
-          <a:noFill/>
-          <a:ln w="30480">
-            <a:solidFill>
-              <a:srgbClr val="3F8F5C"/>
-            </a:solidFill>
-            <a:prstDash val="solid"/>
-            <a:headEnd type="none"/>
-            <a:tailEnd type="triangle"/>
-          </a:ln>
-        </p:spPr>
       </p:sp>
     </p:spTree>
   </p:cSld>
